--- a/output/wordlabs-sec-3day.pptx
+++ b/output/wordlabs-sec-3day.pptx
@@ -4240,7 +4240,7 @@
                 <a:ea typeface="Calibri" pitchFamily="34" charset="-122"/>
                 <a:cs typeface="Calibri" pitchFamily="34" charset="-120"/>
               </a:rPr>
-              <a:t>"cut, divide, separate"</a:t>
+              <a:t>"cut, divide, or separate"</a:t>
             </a:r>
             <a:endParaRPr lang="en-US" sz="2200" dirty="0"/>
           </a:p>
@@ -5288,7 +5288,7 @@
                 <a:ea typeface="Calibri" pitchFamily="34" charset="-122"/>
                 <a:cs typeface="Calibri" pitchFamily="34" charset="-120"/>
               </a:rPr>
-              <a:t>Word Labs  •  wordlabs.app  •  Root: 'sec' = cut, divide, separate</a:t>
+              <a:t>Word Labs  •  wordlabs.app  •  Root: 'sec' = cut, divide, or separate</a:t>
             </a:r>
             <a:endParaRPr lang="en-US" sz="800" dirty="0"/>
           </a:p>
@@ -5928,7 +5928,7 @@
                 <a:ea typeface="Calibri" pitchFamily="34" charset="-122"/>
                 <a:cs typeface="Calibri" pitchFamily="34" charset="-120"/>
               </a:rPr>
-              <a:t>Word Labs  •  wordlabs.app  •  Root: 'sec' = cut, divide, separate</a:t>
+              <a:t>Word Labs  •  wordlabs.app  •  Root: 'sec' = cut, divide, or separate</a:t>
             </a:r>
             <a:endParaRPr lang="en-US" sz="800" dirty="0"/>
           </a:p>
@@ -6040,7 +6040,7 @@
                 <a:ea typeface="Calibri" pitchFamily="34" charset="-122"/>
                 <a:cs typeface="Calibri" pitchFamily="34" charset="-120"/>
               </a:rPr>
-              <a:t>Can you </a:t>
+              <a:t>We used a ruler to </a:t>
             </a:r>
             <a:pPr algn="l" indent="0" marL="0">
               <a:buNone/>
@@ -6071,7 +6071,7 @@
                 <a:ea typeface="Calibri" pitchFamily="34" charset="-122"/>
                 <a:cs typeface="Calibri" pitchFamily="34" charset="-120"/>
               </a:rPr>
-              <a:t> the circle and label each </a:t>
+              <a:t> the angle, then labelled each </a:t>
             </a:r>
             <a:pPr algn="l" indent="0" marL="0">
               <a:buNone/>
@@ -6102,7 +6102,7 @@
                 <a:ea typeface="Calibri" pitchFamily="34" charset="-122"/>
                 <a:cs typeface="Calibri" pitchFamily="34" charset="-120"/>
               </a:rPr>
-              <a:t> clearly?</a:t>
+              <a:t> of our diagram.</a:t>
             </a:r>
             <a:endParaRPr lang="en-US" sz="1800" dirty="0"/>
           </a:p>
@@ -6716,7 +6716,7 @@
                 <a:ea typeface="Calibri" pitchFamily="34" charset="-122"/>
                 <a:cs typeface="Calibri" pitchFamily="34" charset="-120"/>
               </a:rPr>
-              <a:t>Word Labs  •  wordlabs.app  •  Root: 'sec' = cut, divide, separate</a:t>
+              <a:t>Word Labs  •  wordlabs.app  •  Root: 'sec' = cut, divide, or separate</a:t>
             </a:r>
             <a:endParaRPr lang="en-US" sz="800" dirty="0"/>
           </a:p>
@@ -7543,7 +7543,7 @@
                 <a:ea typeface="Calibri" pitchFamily="34" charset="-122"/>
                 <a:cs typeface="Calibri" pitchFamily="34" charset="-120"/>
               </a:rPr>
-              <a:t>Word Labs  •  wordlabs.app  •  Root: 'sec' = cut, divide, separate</a:t>
+              <a:t>Word Labs  •  wordlabs.app  •  Root: 'sec' = cut, divide, or separate</a:t>
             </a:r>
             <a:endParaRPr lang="en-US" sz="800" dirty="0"/>
           </a:p>
@@ -8640,7 +8640,7 @@
                 <a:ea typeface="Calibri" pitchFamily="34" charset="-122"/>
                 <a:cs typeface="Calibri" pitchFamily="34" charset="-120"/>
               </a:rPr>
-              <a:t>Word Labs  •  wordlabs.app  •  Root: 'sec' = cut, divide, separate</a:t>
+              <a:t>Word Labs  •  wordlabs.app  •  Root: 'sec' = cut, divide, or separate</a:t>
             </a:r>
             <a:endParaRPr lang="en-US" sz="800" dirty="0"/>
           </a:p>
@@ -9869,7 +9869,7 @@
                 <a:ea typeface="Calibri" pitchFamily="34" charset="-122"/>
                 <a:cs typeface="Calibri" pitchFamily="34" charset="-120"/>
               </a:rPr>
-              <a:t>Word Labs  •  wordlabs.app  •  Root: 'sec' = cut, divide, separate</a:t>
+              <a:t>Word Labs  •  wordlabs.app  •  Root: 'sec' = cut, divide, or separate</a:t>
             </a:r>
             <a:endParaRPr lang="en-US" sz="800" dirty="0"/>
           </a:p>
@@ -11455,7 +11455,7 @@
                 <a:ea typeface="Calibri" pitchFamily="34" charset="-122"/>
                 <a:cs typeface="Calibri" pitchFamily="34" charset="-120"/>
               </a:rPr>
-              <a:t>Word Labs  •  wordlabs.app  •  Root: 'sec' = cut, divide, separate</a:t>
+              <a:t>Word Labs  •  wordlabs.app  •  Root: 'sec' = cut, divide, or separate</a:t>
             </a:r>
             <a:endParaRPr lang="en-US" sz="800" dirty="0"/>
           </a:p>
@@ -12282,7 +12282,7 @@
                 <a:ea typeface="Calibri" pitchFamily="34" charset="-122"/>
                 <a:cs typeface="Calibri" pitchFamily="34" charset="-120"/>
               </a:rPr>
-              <a:t>Word Labs  •  wordlabs.app  •  Root: 'sec' = cut, divide, separate</a:t>
+              <a:t>Word Labs  •  wordlabs.app  •  Root: 'sec' = cut, divide, or separate</a:t>
             </a:r>
             <a:endParaRPr lang="en-US" sz="800" dirty="0"/>
           </a:p>
@@ -12501,7 +12501,7 @@
         </p:nvSpPr>
         <p:spPr>
           <a:xfrm>
-            <a:off x="2938272" y="2258568"/>
+            <a:off x="2221992" y="2258568"/>
             <a:ext cx="1828800" cy="292608"/>
           </a:xfrm>
           <a:prstGeom prst="rect">
@@ -12535,7 +12535,7 @@
         </p:nvSpPr>
         <p:spPr>
           <a:xfrm>
-            <a:off x="2938272" y="2258568"/>
+            <a:off x="2221992" y="2258568"/>
             <a:ext cx="1828800" cy="292608"/>
           </a:xfrm>
           <a:prstGeom prst="rect">
@@ -12574,7 +12574,7 @@
         </p:nvSpPr>
         <p:spPr>
           <a:xfrm>
-            <a:off x="2938272" y="2569464"/>
+            <a:off x="2221992" y="2569464"/>
             <a:ext cx="1828800" cy="201168"/>
           </a:xfrm>
           <a:prstGeom prst="rect">
@@ -12613,7 +12613,7 @@
         </p:nvSpPr>
         <p:spPr>
           <a:xfrm>
-            <a:off x="5803392" y="2258568"/>
+            <a:off x="4370832" y="2258568"/>
             <a:ext cx="1828800" cy="292608"/>
           </a:xfrm>
           <a:prstGeom prst="rect">
@@ -12647,7 +12647,7 @@
         </p:nvSpPr>
         <p:spPr>
           <a:xfrm>
-            <a:off x="5803392" y="2258568"/>
+            <a:off x="4370832" y="2258568"/>
             <a:ext cx="1828800" cy="292608"/>
           </a:xfrm>
           <a:prstGeom prst="rect">
@@ -12672,7 +12672,7 @@
                 <a:ea typeface="Trebuchet MS" pitchFamily="34" charset="-122"/>
                 <a:cs typeface="Trebuchet MS" pitchFamily="34" charset="-120"/>
               </a:rPr>
-              <a:t>tion</a:t>
+              <a:t>t</a:t>
             </a:r>
             <a:endParaRPr lang="en-US" sz="1300" dirty="0"/>
           </a:p>
@@ -12686,7 +12686,7 @@
         </p:nvSpPr>
         <p:spPr>
           <a:xfrm>
-            <a:off x="5803392" y="2569464"/>
+            <a:off x="4370832" y="2569464"/>
             <a:ext cx="1828800" cy="201168"/>
           </a:xfrm>
           <a:prstGeom prst="rect">
@@ -12711,7 +12711,7 @@
                 <a:ea typeface="Calibri" pitchFamily="34" charset="-122"/>
                 <a:cs typeface="Calibri" pitchFamily="34" charset="-120"/>
               </a:rPr>
-              <a:t>act or result of</a:t>
+              <a:t>connecting element</a:t>
             </a:r>
             <a:endParaRPr lang="en-US" sz="850" dirty="0"/>
           </a:p>
@@ -12719,14 +12719,87 @@
       </p:sp>
       <p:sp>
         <p:nvSpPr>
-          <p:cNvPr id="22" name="Text 20"/>
-          <p:cNvSpPr/>
-          <p:nvPr/>
-        </p:nvSpPr>
-        <p:spPr>
-          <a:xfrm>
-            <a:off x="5803392" y="2752344"/>
-            <a:ext cx="1828800" cy="182880"/>
+          <p:cNvPr id="22" name="Shape 20"/>
+          <p:cNvSpPr/>
+          <p:nvPr/>
+        </p:nvSpPr>
+        <p:spPr>
+          <a:xfrm>
+            <a:off x="6519672" y="2258568"/>
+            <a:ext cx="1828800" cy="292608"/>
+          </a:xfrm>
+          <a:prstGeom prst="rect">
+            <a:avLst>
+              <a:gd name="adj" fmla="val 25000"/>
+            </a:avLst>
+          </a:prstGeom>
+          <a:solidFill>
+            <a:srgbClr val="FCE7F3"/>
+          </a:solidFill>
+          <a:ln w="19050">
+            <a:solidFill>
+              <a:srgbClr val="DB2777"/>
+            </a:solidFill>
+            <a:prstDash val="solid"/>
+          </a:ln>
+          <a:effectLst>
+            <a:outerShdw sx="100000" sy="100000" kx="0" ky="0" algn="bl" rotWithShape="0" blurRad="101600" dist="38100" dir="8100000">
+              <a:srgbClr val="000000">
+                <a:alpha val="12000"/>
+              </a:srgbClr>
+            </a:outerShdw>
+          </a:effectLst>
+        </p:spPr>
+      </p:sp>
+      <p:sp>
+        <p:nvSpPr>
+          <p:cNvPr id="23" name="Text 21"/>
+          <p:cNvSpPr/>
+          <p:nvPr/>
+        </p:nvSpPr>
+        <p:spPr>
+          <a:xfrm>
+            <a:off x="6519672" y="2258568"/>
+            <a:ext cx="1828800" cy="292608"/>
+          </a:xfrm>
+          <a:prstGeom prst="rect">
+            <a:avLst/>
+          </a:prstGeom>
+          <a:noFill/>
+          <a:ln/>
+        </p:spPr>
+        <p:txBody>
+          <a:bodyPr wrap="square" lIns="0" tIns="0" rIns="0" bIns="0" rtlCol="0" anchor="ctr"/>
+          <a:lstStyle/>
+          <a:p>
+            <a:pPr algn="ctr" indent="0" marL="0">
+              <a:buNone/>
+            </a:pPr>
+            <a:r>
+              <a:rPr lang="en-US" sz="1300" b="1" dirty="0">
+                <a:solidFill>
+                  <a:srgbClr val="9D174D"/>
+                </a:solidFill>
+                <a:latin typeface="Trebuchet MS" pitchFamily="34" charset="0"/>
+                <a:ea typeface="Trebuchet MS" pitchFamily="34" charset="-122"/>
+                <a:cs typeface="Trebuchet MS" pitchFamily="34" charset="-120"/>
+              </a:rPr>
+              <a:t>ion</a:t>
+            </a:r>
+            <a:endParaRPr lang="en-US" sz="1300" dirty="0"/>
+          </a:p>
+        </p:txBody>
+      </p:sp>
+      <p:sp>
+        <p:nvSpPr>
+          <p:cNvPr id="24" name="Text 22"/>
+          <p:cNvSpPr/>
+          <p:nvPr/>
+        </p:nvSpPr>
+        <p:spPr>
+          <a:xfrm>
+            <a:off x="6519672" y="2569464"/>
+            <a:ext cx="1828800" cy="201168"/>
           </a:xfrm>
           <a:prstGeom prst="rect">
             <a:avLst/>
@@ -12742,23 +12815,23 @@
               <a:buNone/>
             </a:pPr>
             <a:r>
-              <a:rPr lang="en-US" sz="700" i="1" dirty="0">
-                <a:solidFill>
-                  <a:srgbClr val="94A3B8"/>
+              <a:rPr lang="en-US" sz="850" dirty="0">
+                <a:solidFill>
+                  <a:srgbClr val="475569"/>
                 </a:solidFill>
                 <a:latin typeface="Calibri" pitchFamily="34" charset="0"/>
                 <a:ea typeface="Calibri" pitchFamily="34" charset="-122"/>
                 <a:cs typeface="Calibri" pitchFamily="34" charset="-120"/>
               </a:rPr>
-              <a:t>ti makes /sh/ sound</a:t>
-            </a:r>
-            <a:endParaRPr lang="en-US" sz="700" dirty="0"/>
-          </a:p>
-        </p:txBody>
-      </p:sp>
-      <p:sp>
-        <p:nvSpPr>
-          <p:cNvPr id="23" name="Shape 21"/>
+              <a:t>state or result of</a:t>
+            </a:r>
+            <a:endParaRPr lang="en-US" sz="850" dirty="0"/>
+          </a:p>
+        </p:txBody>
+      </p:sp>
+      <p:sp>
+        <p:nvSpPr>
+          <p:cNvPr id="25" name="Shape 23"/>
           <p:cNvSpPr/>
           <p:nvPr/>
         </p:nvSpPr>
@@ -12785,7 +12858,7 @@
       </p:sp>
       <p:sp>
         <p:nvSpPr>
-          <p:cNvPr id="24" name="Text 22"/>
+          <p:cNvPr id="26" name="Text 24"/>
           <p:cNvSpPr/>
           <p:nvPr/>
         </p:nvSpPr>
@@ -12824,7 +12897,7 @@
       </p:sp>
       <p:sp>
         <p:nvSpPr>
-          <p:cNvPr id="25" name="Shape 23"/>
+          <p:cNvPr id="27" name="Shape 25"/>
           <p:cNvSpPr/>
           <p:nvPr/>
         </p:nvSpPr>
@@ -12851,7 +12924,7 @@
       </p:sp>
       <p:sp>
         <p:nvSpPr>
-          <p:cNvPr id="26" name="Text 24"/>
+          <p:cNvPr id="28" name="Text 26"/>
           <p:cNvSpPr/>
           <p:nvPr/>
         </p:nvSpPr>
@@ -12890,7 +12963,7 @@
       </p:sp>
       <p:sp>
         <p:nvSpPr>
-          <p:cNvPr id="27" name="Shape 25"/>
+          <p:cNvPr id="29" name="Shape 27"/>
           <p:cNvSpPr/>
           <p:nvPr/>
         </p:nvSpPr>
@@ -12917,7 +12990,7 @@
       </p:sp>
       <p:sp>
         <p:nvSpPr>
-          <p:cNvPr id="28" name="Text 26"/>
+          <p:cNvPr id="30" name="Text 28"/>
           <p:cNvSpPr/>
           <p:nvPr/>
         </p:nvSpPr>
@@ -12956,7 +13029,7 @@
       </p:sp>
       <p:sp>
         <p:nvSpPr>
-          <p:cNvPr id="29" name="Shape 27"/>
+          <p:cNvPr id="31" name="Shape 29"/>
           <p:cNvSpPr/>
           <p:nvPr/>
         </p:nvSpPr>
@@ -12983,7 +13056,7 @@
       </p:sp>
       <p:sp>
         <p:nvSpPr>
-          <p:cNvPr id="30" name="Text 28"/>
+          <p:cNvPr id="32" name="Text 30"/>
           <p:cNvSpPr/>
           <p:nvPr/>
         </p:nvSpPr>
@@ -13306,7 +13379,7 @@
                 <a:ea typeface="Calibri" pitchFamily="34" charset="-122"/>
                 <a:cs typeface="Calibri" pitchFamily="34" charset="-120"/>
               </a:rPr>
-              <a:t>Word Labs  •  wordlabs.app  •  Root: 'sec' = cut, divide, separate</a:t>
+              <a:t>Word Labs  •  wordlabs.app  •  Root: 'sec' = cut, divide, or separate</a:t>
             </a:r>
             <a:endParaRPr lang="en-US" sz="800" dirty="0"/>
           </a:p>
@@ -13525,7 +13598,7 @@
         </p:nvSpPr>
         <p:spPr>
           <a:xfrm>
-            <a:off x="2938272" y="2258568"/>
+            <a:off x="2221992" y="2258568"/>
             <a:ext cx="1828800" cy="292608"/>
           </a:xfrm>
           <a:prstGeom prst="rect">
@@ -13559,7 +13632,7 @@
         </p:nvSpPr>
         <p:spPr>
           <a:xfrm>
-            <a:off x="2938272" y="2258568"/>
+            <a:off x="2221992" y="2258568"/>
             <a:ext cx="1828800" cy="292608"/>
           </a:xfrm>
           <a:prstGeom prst="rect">
@@ -13598,7 +13671,7 @@
         </p:nvSpPr>
         <p:spPr>
           <a:xfrm>
-            <a:off x="2938272" y="2569464"/>
+            <a:off x="2221992" y="2569464"/>
             <a:ext cx="1828800" cy="201168"/>
           </a:xfrm>
           <a:prstGeom prst="rect">
@@ -13637,7 +13710,7 @@
         </p:nvSpPr>
         <p:spPr>
           <a:xfrm>
-            <a:off x="5803392" y="2258568"/>
+            <a:off x="4370832" y="2258568"/>
             <a:ext cx="1828800" cy="292608"/>
           </a:xfrm>
           <a:prstGeom prst="rect">
@@ -13671,7 +13744,7 @@
         </p:nvSpPr>
         <p:spPr>
           <a:xfrm>
-            <a:off x="5803392" y="2258568"/>
+            <a:off x="4370832" y="2258568"/>
             <a:ext cx="1828800" cy="292608"/>
           </a:xfrm>
           <a:prstGeom prst="rect">
@@ -13696,7 +13769,7 @@
                 <a:ea typeface="Trebuchet MS" pitchFamily="34" charset="-122"/>
                 <a:cs typeface="Trebuchet MS" pitchFamily="34" charset="-120"/>
               </a:rPr>
-              <a:t>tion</a:t>
+              <a:t>t</a:t>
             </a:r>
             <a:endParaRPr lang="en-US" sz="1300" dirty="0"/>
           </a:p>
@@ -13710,7 +13783,7 @@
         </p:nvSpPr>
         <p:spPr>
           <a:xfrm>
-            <a:off x="5803392" y="2569464"/>
+            <a:off x="4370832" y="2569464"/>
             <a:ext cx="1828800" cy="201168"/>
           </a:xfrm>
           <a:prstGeom prst="rect">
@@ -13735,7 +13808,7 @@
                 <a:ea typeface="Calibri" pitchFamily="34" charset="-122"/>
                 <a:cs typeface="Calibri" pitchFamily="34" charset="-120"/>
               </a:rPr>
-              <a:t>act or result of</a:t>
+              <a:t>connecting element</a:t>
             </a:r>
             <a:endParaRPr lang="en-US" sz="850" dirty="0"/>
           </a:p>
@@ -13743,14 +13816,87 @@
       </p:sp>
       <p:sp>
         <p:nvSpPr>
-          <p:cNvPr id="22" name="Text 20"/>
-          <p:cNvSpPr/>
-          <p:nvPr/>
-        </p:nvSpPr>
-        <p:spPr>
-          <a:xfrm>
-            <a:off x="5803392" y="2752344"/>
-            <a:ext cx="1828800" cy="182880"/>
+          <p:cNvPr id="22" name="Shape 20"/>
+          <p:cNvSpPr/>
+          <p:nvPr/>
+        </p:nvSpPr>
+        <p:spPr>
+          <a:xfrm>
+            <a:off x="6519672" y="2258568"/>
+            <a:ext cx="1828800" cy="292608"/>
+          </a:xfrm>
+          <a:prstGeom prst="rect">
+            <a:avLst>
+              <a:gd name="adj" fmla="val 25000"/>
+            </a:avLst>
+          </a:prstGeom>
+          <a:solidFill>
+            <a:srgbClr val="FCE7F3"/>
+          </a:solidFill>
+          <a:ln w="19050">
+            <a:solidFill>
+              <a:srgbClr val="DB2777"/>
+            </a:solidFill>
+            <a:prstDash val="solid"/>
+          </a:ln>
+          <a:effectLst>
+            <a:outerShdw sx="100000" sy="100000" kx="0" ky="0" algn="bl" rotWithShape="0" blurRad="101600" dist="38100" dir="8100000">
+              <a:srgbClr val="000000">
+                <a:alpha val="12000"/>
+              </a:srgbClr>
+            </a:outerShdw>
+          </a:effectLst>
+        </p:spPr>
+      </p:sp>
+      <p:sp>
+        <p:nvSpPr>
+          <p:cNvPr id="23" name="Text 21"/>
+          <p:cNvSpPr/>
+          <p:nvPr/>
+        </p:nvSpPr>
+        <p:spPr>
+          <a:xfrm>
+            <a:off x="6519672" y="2258568"/>
+            <a:ext cx="1828800" cy="292608"/>
+          </a:xfrm>
+          <a:prstGeom prst="rect">
+            <a:avLst/>
+          </a:prstGeom>
+          <a:noFill/>
+          <a:ln/>
+        </p:spPr>
+        <p:txBody>
+          <a:bodyPr wrap="square" lIns="0" tIns="0" rIns="0" bIns="0" rtlCol="0" anchor="ctr"/>
+          <a:lstStyle/>
+          <a:p>
+            <a:pPr algn="ctr" indent="0" marL="0">
+              <a:buNone/>
+            </a:pPr>
+            <a:r>
+              <a:rPr lang="en-US" sz="1300" b="1" dirty="0">
+                <a:solidFill>
+                  <a:srgbClr val="9D174D"/>
+                </a:solidFill>
+                <a:latin typeface="Trebuchet MS" pitchFamily="34" charset="0"/>
+                <a:ea typeface="Trebuchet MS" pitchFamily="34" charset="-122"/>
+                <a:cs typeface="Trebuchet MS" pitchFamily="34" charset="-120"/>
+              </a:rPr>
+              <a:t>ion</a:t>
+            </a:r>
+            <a:endParaRPr lang="en-US" sz="1300" dirty="0"/>
+          </a:p>
+        </p:txBody>
+      </p:sp>
+      <p:sp>
+        <p:nvSpPr>
+          <p:cNvPr id="24" name="Text 22"/>
+          <p:cNvSpPr/>
+          <p:nvPr/>
+        </p:nvSpPr>
+        <p:spPr>
+          <a:xfrm>
+            <a:off x="6519672" y="2569464"/>
+            <a:ext cx="1828800" cy="201168"/>
           </a:xfrm>
           <a:prstGeom prst="rect">
             <a:avLst/>
@@ -13766,23 +13912,23 @@
               <a:buNone/>
             </a:pPr>
             <a:r>
-              <a:rPr lang="en-US" sz="700" i="1" dirty="0">
-                <a:solidFill>
-                  <a:srgbClr val="94A3B8"/>
+              <a:rPr lang="en-US" sz="850" dirty="0">
+                <a:solidFill>
+                  <a:srgbClr val="475569"/>
                 </a:solidFill>
                 <a:latin typeface="Calibri" pitchFamily="34" charset="0"/>
                 <a:ea typeface="Calibri" pitchFamily="34" charset="-122"/>
                 <a:cs typeface="Calibri" pitchFamily="34" charset="-120"/>
               </a:rPr>
-              <a:t>ti makes /sh/ sound</a:t>
-            </a:r>
-            <a:endParaRPr lang="en-US" sz="700" dirty="0"/>
-          </a:p>
-        </p:txBody>
-      </p:sp>
-      <p:sp>
-        <p:nvSpPr>
-          <p:cNvPr id="23" name="Shape 21"/>
+              <a:t>state or result of</a:t>
+            </a:r>
+            <a:endParaRPr lang="en-US" sz="850" dirty="0"/>
+          </a:p>
+        </p:txBody>
+      </p:sp>
+      <p:sp>
+        <p:nvSpPr>
+          <p:cNvPr id="25" name="Shape 23"/>
           <p:cNvSpPr/>
           <p:nvPr/>
         </p:nvSpPr>
@@ -13809,7 +13955,7 @@
       </p:sp>
       <p:sp>
         <p:nvSpPr>
-          <p:cNvPr id="24" name="Text 22"/>
+          <p:cNvPr id="26" name="Text 24"/>
           <p:cNvSpPr/>
           <p:nvPr/>
         </p:nvSpPr>
@@ -13848,7 +13994,7 @@
       </p:sp>
       <p:sp>
         <p:nvSpPr>
-          <p:cNvPr id="25" name="Shape 23"/>
+          <p:cNvPr id="27" name="Shape 25"/>
           <p:cNvSpPr/>
           <p:nvPr/>
         </p:nvSpPr>
@@ -13875,7 +14021,7 @@
       </p:sp>
       <p:sp>
         <p:nvSpPr>
-          <p:cNvPr id="26" name="Shape 24"/>
+          <p:cNvPr id="28" name="Shape 26"/>
           <p:cNvSpPr/>
           <p:nvPr/>
         </p:nvSpPr>
@@ -13902,7 +14048,7 @@
       </p:sp>
       <p:sp>
         <p:nvSpPr>
-          <p:cNvPr id="27" name="Text 25"/>
+          <p:cNvPr id="29" name="Text 27"/>
           <p:cNvSpPr/>
           <p:nvPr/>
         </p:nvSpPr>
@@ -13941,7 +14087,7 @@
       </p:sp>
       <p:sp>
         <p:nvSpPr>
-          <p:cNvPr id="28" name="Text 26"/>
+          <p:cNvPr id="30" name="Text 28"/>
           <p:cNvSpPr/>
           <p:nvPr/>
         </p:nvSpPr>
@@ -13980,7 +14126,7 @@
       </p:sp>
       <p:sp>
         <p:nvSpPr>
-          <p:cNvPr id="29" name="Shape 27"/>
+          <p:cNvPr id="31" name="Shape 29"/>
           <p:cNvSpPr/>
           <p:nvPr/>
         </p:nvSpPr>
@@ -14007,7 +14153,7 @@
       </p:sp>
       <p:sp>
         <p:nvSpPr>
-          <p:cNvPr id="30" name="Text 28"/>
+          <p:cNvPr id="32" name="Text 30"/>
           <p:cNvSpPr/>
           <p:nvPr/>
         </p:nvSpPr>
@@ -14046,7 +14192,7 @@
       </p:sp>
       <p:sp>
         <p:nvSpPr>
-          <p:cNvPr id="31" name="Shape 29"/>
+          <p:cNvPr id="33" name="Shape 31"/>
           <p:cNvSpPr/>
           <p:nvPr/>
         </p:nvSpPr>
@@ -14073,7 +14219,7 @@
       </p:sp>
       <p:sp>
         <p:nvSpPr>
-          <p:cNvPr id="32" name="Text 30"/>
+          <p:cNvPr id="34" name="Text 32"/>
           <p:cNvSpPr/>
           <p:nvPr/>
         </p:nvSpPr>
@@ -14112,7 +14258,7 @@
       </p:sp>
       <p:sp>
         <p:nvSpPr>
-          <p:cNvPr id="33" name="Shape 31"/>
+          <p:cNvPr id="35" name="Shape 33"/>
           <p:cNvSpPr/>
           <p:nvPr/>
         </p:nvSpPr>
@@ -14139,7 +14285,7 @@
       </p:sp>
       <p:sp>
         <p:nvSpPr>
-          <p:cNvPr id="34" name="Text 32"/>
+          <p:cNvPr id="36" name="Text 34"/>
           <p:cNvSpPr/>
           <p:nvPr/>
         </p:nvSpPr>
@@ -14371,7 +14517,7 @@
                 <a:ea typeface="Calibri" pitchFamily="34" charset="-122"/>
                 <a:cs typeface="Calibri" pitchFamily="34" charset="-120"/>
               </a:rPr>
-              <a:t>Root 'sec' — cut, divide, separate</a:t>
+              <a:t>Root 'sec' — cut, divide, or separate</a:t>
             </a:r>
             <a:endParaRPr lang="en-US" sz="1600" dirty="0"/>
           </a:p>
@@ -14727,7 +14873,7 @@
                 <a:ea typeface="Calibri" pitchFamily="34" charset="-122"/>
                 <a:cs typeface="Calibri" pitchFamily="34" charset="-120"/>
               </a:rPr>
-              <a:t>Word Labs  •  wordlabs.app  •  Root: 'sec' = cut, divide, separate</a:t>
+              <a:t>Word Labs  •  wordlabs.app  •  Root: 'sec' = cut, divide, or separate</a:t>
             </a:r>
             <a:endParaRPr lang="en-US" sz="800" dirty="0"/>
           </a:p>
@@ -14946,7 +15092,7 @@
         </p:nvSpPr>
         <p:spPr>
           <a:xfrm>
-            <a:off x="2938272" y="2258568"/>
+            <a:off x="2221992" y="2258568"/>
             <a:ext cx="1828800" cy="292608"/>
           </a:xfrm>
           <a:prstGeom prst="rect">
@@ -14980,7 +15126,7 @@
         </p:nvSpPr>
         <p:spPr>
           <a:xfrm>
-            <a:off x="2938272" y="2258568"/>
+            <a:off x="2221992" y="2258568"/>
             <a:ext cx="1828800" cy="292608"/>
           </a:xfrm>
           <a:prstGeom prst="rect">
@@ -15019,7 +15165,7 @@
         </p:nvSpPr>
         <p:spPr>
           <a:xfrm>
-            <a:off x="2938272" y="2569464"/>
+            <a:off x="2221992" y="2569464"/>
             <a:ext cx="1828800" cy="201168"/>
           </a:xfrm>
           <a:prstGeom prst="rect">
@@ -15058,7 +15204,7 @@
         </p:nvSpPr>
         <p:spPr>
           <a:xfrm>
-            <a:off x="5803392" y="2258568"/>
+            <a:off x="4370832" y="2258568"/>
             <a:ext cx="1828800" cy="292608"/>
           </a:xfrm>
           <a:prstGeom prst="rect">
@@ -15092,7 +15238,7 @@
         </p:nvSpPr>
         <p:spPr>
           <a:xfrm>
-            <a:off x="5803392" y="2258568"/>
+            <a:off x="4370832" y="2258568"/>
             <a:ext cx="1828800" cy="292608"/>
           </a:xfrm>
           <a:prstGeom prst="rect">
@@ -15117,7 +15263,7 @@
                 <a:ea typeface="Trebuchet MS" pitchFamily="34" charset="-122"/>
                 <a:cs typeface="Trebuchet MS" pitchFamily="34" charset="-120"/>
               </a:rPr>
-              <a:t>tion</a:t>
+              <a:t>t</a:t>
             </a:r>
             <a:endParaRPr lang="en-US" sz="1300" dirty="0"/>
           </a:p>
@@ -15131,7 +15277,7 @@
         </p:nvSpPr>
         <p:spPr>
           <a:xfrm>
-            <a:off x="5803392" y="2569464"/>
+            <a:off x="4370832" y="2569464"/>
             <a:ext cx="1828800" cy="201168"/>
           </a:xfrm>
           <a:prstGeom prst="rect">
@@ -15156,7 +15302,7 @@
                 <a:ea typeface="Calibri" pitchFamily="34" charset="-122"/>
                 <a:cs typeface="Calibri" pitchFamily="34" charset="-120"/>
               </a:rPr>
-              <a:t>act or result of</a:t>
+              <a:t>connecting element</a:t>
             </a:r>
             <a:endParaRPr lang="en-US" sz="850" dirty="0"/>
           </a:p>
@@ -15164,14 +15310,87 @@
       </p:sp>
       <p:sp>
         <p:nvSpPr>
-          <p:cNvPr id="22" name="Text 20"/>
-          <p:cNvSpPr/>
-          <p:nvPr/>
-        </p:nvSpPr>
-        <p:spPr>
-          <a:xfrm>
-            <a:off x="5803392" y="2752344"/>
-            <a:ext cx="1828800" cy="182880"/>
+          <p:cNvPr id="22" name="Shape 20"/>
+          <p:cNvSpPr/>
+          <p:nvPr/>
+        </p:nvSpPr>
+        <p:spPr>
+          <a:xfrm>
+            <a:off x="6519672" y="2258568"/>
+            <a:ext cx="1828800" cy="292608"/>
+          </a:xfrm>
+          <a:prstGeom prst="rect">
+            <a:avLst>
+              <a:gd name="adj" fmla="val 25000"/>
+            </a:avLst>
+          </a:prstGeom>
+          <a:solidFill>
+            <a:srgbClr val="FCE7F3"/>
+          </a:solidFill>
+          <a:ln w="19050">
+            <a:solidFill>
+              <a:srgbClr val="DB2777"/>
+            </a:solidFill>
+            <a:prstDash val="solid"/>
+          </a:ln>
+          <a:effectLst>
+            <a:outerShdw sx="100000" sy="100000" kx="0" ky="0" algn="bl" rotWithShape="0" blurRad="101600" dist="38100" dir="8100000">
+              <a:srgbClr val="000000">
+                <a:alpha val="12000"/>
+              </a:srgbClr>
+            </a:outerShdw>
+          </a:effectLst>
+        </p:spPr>
+      </p:sp>
+      <p:sp>
+        <p:nvSpPr>
+          <p:cNvPr id="23" name="Text 21"/>
+          <p:cNvSpPr/>
+          <p:nvPr/>
+        </p:nvSpPr>
+        <p:spPr>
+          <a:xfrm>
+            <a:off x="6519672" y="2258568"/>
+            <a:ext cx="1828800" cy="292608"/>
+          </a:xfrm>
+          <a:prstGeom prst="rect">
+            <a:avLst/>
+          </a:prstGeom>
+          <a:noFill/>
+          <a:ln/>
+        </p:spPr>
+        <p:txBody>
+          <a:bodyPr wrap="square" lIns="0" tIns="0" rIns="0" bIns="0" rtlCol="0" anchor="ctr"/>
+          <a:lstStyle/>
+          <a:p>
+            <a:pPr algn="ctr" indent="0" marL="0">
+              <a:buNone/>
+            </a:pPr>
+            <a:r>
+              <a:rPr lang="en-US" sz="1300" b="1" dirty="0">
+                <a:solidFill>
+                  <a:srgbClr val="9D174D"/>
+                </a:solidFill>
+                <a:latin typeface="Trebuchet MS" pitchFamily="34" charset="0"/>
+                <a:ea typeface="Trebuchet MS" pitchFamily="34" charset="-122"/>
+                <a:cs typeface="Trebuchet MS" pitchFamily="34" charset="-120"/>
+              </a:rPr>
+              <a:t>ion</a:t>
+            </a:r>
+            <a:endParaRPr lang="en-US" sz="1300" dirty="0"/>
+          </a:p>
+        </p:txBody>
+      </p:sp>
+      <p:sp>
+        <p:nvSpPr>
+          <p:cNvPr id="24" name="Text 22"/>
+          <p:cNvSpPr/>
+          <p:nvPr/>
+        </p:nvSpPr>
+        <p:spPr>
+          <a:xfrm>
+            <a:off x="6519672" y="2569464"/>
+            <a:ext cx="1828800" cy="201168"/>
           </a:xfrm>
           <a:prstGeom prst="rect">
             <a:avLst/>
@@ -15187,23 +15406,23 @@
               <a:buNone/>
             </a:pPr>
             <a:r>
-              <a:rPr lang="en-US" sz="700" i="1" dirty="0">
-                <a:solidFill>
-                  <a:srgbClr val="94A3B8"/>
+              <a:rPr lang="en-US" sz="850" dirty="0">
+                <a:solidFill>
+                  <a:srgbClr val="475569"/>
                 </a:solidFill>
                 <a:latin typeface="Calibri" pitchFamily="34" charset="0"/>
                 <a:ea typeface="Calibri" pitchFamily="34" charset="-122"/>
                 <a:cs typeface="Calibri" pitchFamily="34" charset="-120"/>
               </a:rPr>
-              <a:t>ti makes /sh/ sound</a:t>
-            </a:r>
-            <a:endParaRPr lang="en-US" sz="700" dirty="0"/>
-          </a:p>
-        </p:txBody>
-      </p:sp>
-      <p:sp>
-        <p:nvSpPr>
-          <p:cNvPr id="23" name="Shape 21"/>
+              <a:t>state or result of</a:t>
+            </a:r>
+            <a:endParaRPr lang="en-US" sz="850" dirty="0"/>
+          </a:p>
+        </p:txBody>
+      </p:sp>
+      <p:sp>
+        <p:nvSpPr>
+          <p:cNvPr id="25" name="Shape 23"/>
           <p:cNvSpPr/>
           <p:nvPr/>
         </p:nvSpPr>
@@ -15230,7 +15449,7 @@
       </p:sp>
       <p:sp>
         <p:nvSpPr>
-          <p:cNvPr id="24" name="Text 22"/>
+          <p:cNvPr id="26" name="Text 24"/>
           <p:cNvSpPr/>
           <p:nvPr/>
         </p:nvSpPr>
@@ -15269,7 +15488,7 @@
       </p:sp>
       <p:sp>
         <p:nvSpPr>
-          <p:cNvPr id="25" name="Shape 23"/>
+          <p:cNvPr id="27" name="Shape 25"/>
           <p:cNvSpPr/>
           <p:nvPr/>
         </p:nvSpPr>
@@ -15296,7 +15515,7 @@
       </p:sp>
       <p:sp>
         <p:nvSpPr>
-          <p:cNvPr id="26" name="Shape 24"/>
+          <p:cNvPr id="28" name="Shape 26"/>
           <p:cNvSpPr/>
           <p:nvPr/>
         </p:nvSpPr>
@@ -15323,7 +15542,7 @@
       </p:sp>
       <p:sp>
         <p:nvSpPr>
-          <p:cNvPr id="27" name="Text 25"/>
+          <p:cNvPr id="29" name="Text 27"/>
           <p:cNvSpPr/>
           <p:nvPr/>
         </p:nvSpPr>
@@ -15362,7 +15581,7 @@
       </p:sp>
       <p:sp>
         <p:nvSpPr>
-          <p:cNvPr id="28" name="Text 26"/>
+          <p:cNvPr id="30" name="Text 28"/>
           <p:cNvSpPr/>
           <p:nvPr/>
         </p:nvSpPr>
@@ -15401,7 +15620,7 @@
       </p:sp>
       <p:sp>
         <p:nvSpPr>
-          <p:cNvPr id="29" name="Shape 27"/>
+          <p:cNvPr id="31" name="Shape 29"/>
           <p:cNvSpPr/>
           <p:nvPr/>
         </p:nvSpPr>
@@ -15428,7 +15647,7 @@
       </p:sp>
       <p:sp>
         <p:nvSpPr>
-          <p:cNvPr id="30" name="Text 28"/>
+          <p:cNvPr id="32" name="Text 30"/>
           <p:cNvSpPr/>
           <p:nvPr/>
         </p:nvSpPr>
@@ -15467,7 +15686,7 @@
       </p:sp>
       <p:sp>
         <p:nvSpPr>
-          <p:cNvPr id="31" name="Shape 29"/>
+          <p:cNvPr id="33" name="Shape 31"/>
           <p:cNvSpPr/>
           <p:nvPr/>
         </p:nvSpPr>
@@ -15494,7 +15713,7 @@
       </p:sp>
       <p:sp>
         <p:nvSpPr>
-          <p:cNvPr id="32" name="Text 30"/>
+          <p:cNvPr id="34" name="Text 32"/>
           <p:cNvSpPr/>
           <p:nvPr/>
         </p:nvSpPr>
@@ -15533,7 +15752,7 @@
       </p:sp>
       <p:sp>
         <p:nvSpPr>
-          <p:cNvPr id="33" name="Shape 31"/>
+          <p:cNvPr id="35" name="Shape 33"/>
           <p:cNvSpPr/>
           <p:nvPr/>
         </p:nvSpPr>
@@ -15560,7 +15779,7 @@
       </p:sp>
       <p:sp>
         <p:nvSpPr>
-          <p:cNvPr id="34" name="Shape 32"/>
+          <p:cNvPr id="36" name="Shape 34"/>
           <p:cNvSpPr/>
           <p:nvPr/>
         </p:nvSpPr>
@@ -15587,7 +15806,7 @@
       </p:sp>
       <p:sp>
         <p:nvSpPr>
-          <p:cNvPr id="35" name="Text 33"/>
+          <p:cNvPr id="37" name="Text 35"/>
           <p:cNvSpPr/>
           <p:nvPr/>
         </p:nvSpPr>
@@ -15626,7 +15845,7 @@
       </p:sp>
       <p:sp>
         <p:nvSpPr>
-          <p:cNvPr id="36" name="Shape 34"/>
+          <p:cNvPr id="38" name="Shape 36"/>
           <p:cNvSpPr/>
           <p:nvPr/>
         </p:nvSpPr>
@@ -15653,7 +15872,7 @@
       </p:sp>
       <p:sp>
         <p:nvSpPr>
-          <p:cNvPr id="37" name="Text 35"/>
+          <p:cNvPr id="39" name="Text 37"/>
           <p:cNvSpPr/>
           <p:nvPr/>
         </p:nvSpPr>
@@ -15692,7 +15911,7 @@
       </p:sp>
       <p:sp>
         <p:nvSpPr>
-          <p:cNvPr id="38" name="Shape 36"/>
+          <p:cNvPr id="40" name="Shape 38"/>
           <p:cNvSpPr/>
           <p:nvPr/>
         </p:nvSpPr>
@@ -15719,7 +15938,7 @@
       </p:sp>
       <p:sp>
         <p:nvSpPr>
-          <p:cNvPr id="39" name="Text 37"/>
+          <p:cNvPr id="41" name="Text 39"/>
           <p:cNvSpPr/>
           <p:nvPr/>
         </p:nvSpPr>
@@ -15758,7 +15977,7 @@
       </p:sp>
       <p:sp>
         <p:nvSpPr>
-          <p:cNvPr id="40" name="Shape 38"/>
+          <p:cNvPr id="42" name="Shape 40"/>
           <p:cNvSpPr/>
           <p:nvPr/>
         </p:nvSpPr>
@@ -15785,7 +16004,7 @@
       </p:sp>
       <p:sp>
         <p:nvSpPr>
-          <p:cNvPr id="41" name="Text 39"/>
+          <p:cNvPr id="43" name="Text 41"/>
           <p:cNvSpPr/>
           <p:nvPr/>
         </p:nvSpPr>
@@ -15824,7 +16043,7 @@
       </p:sp>
       <p:sp>
         <p:nvSpPr>
-          <p:cNvPr id="42" name="Text 40"/>
+          <p:cNvPr id="44" name="Text 42"/>
           <p:cNvSpPr/>
           <p:nvPr/>
         </p:nvSpPr>
@@ -15863,7 +16082,7 @@
       </p:sp>
       <p:sp>
         <p:nvSpPr>
-          <p:cNvPr id="43" name="Shape 41"/>
+          <p:cNvPr id="45" name="Shape 43"/>
           <p:cNvSpPr/>
           <p:nvPr/>
         </p:nvSpPr>
@@ -15890,7 +16109,7 @@
       </p:sp>
       <p:sp>
         <p:nvSpPr>
-          <p:cNvPr id="44" name="Text 42"/>
+          <p:cNvPr id="46" name="Text 44"/>
           <p:cNvSpPr/>
           <p:nvPr/>
         </p:nvSpPr>
@@ -15929,7 +16148,7 @@
       </p:sp>
       <p:sp>
         <p:nvSpPr>
-          <p:cNvPr id="45" name="Shape 43"/>
+          <p:cNvPr id="47" name="Shape 45"/>
           <p:cNvSpPr/>
           <p:nvPr/>
         </p:nvSpPr>
@@ -15956,7 +16175,7 @@
       </p:sp>
       <p:sp>
         <p:nvSpPr>
-          <p:cNvPr id="46" name="Text 44"/>
+          <p:cNvPr id="48" name="Text 46"/>
           <p:cNvSpPr/>
           <p:nvPr/>
         </p:nvSpPr>
@@ -16561,7 +16780,7 @@
                 <a:ea typeface="Calibri" pitchFamily="34" charset="-122"/>
                 <a:cs typeface="Calibri" pitchFamily="34" charset="-120"/>
               </a:rPr>
-              <a:t>Word Labs  •  wordlabs.app  •  Root: 'sec' = cut, divide, separate</a:t>
+              <a:t>Word Labs  •  wordlabs.app  •  Root: 'sec' = cut, divide, or separate</a:t>
             </a:r>
             <a:endParaRPr lang="en-US" sz="800" dirty="0"/>
           </a:p>
@@ -17201,7 +17420,7 @@
                 <a:ea typeface="Calibri" pitchFamily="34" charset="-122"/>
                 <a:cs typeface="Calibri" pitchFamily="34" charset="-120"/>
               </a:rPr>
-              <a:t>Word Labs  •  wordlabs.app  •  Root: 'sec' = cut, divide, separate</a:t>
+              <a:t>Word Labs  •  wordlabs.app  •  Root: 'sec' = cut, divide, or separate</a:t>
             </a:r>
             <a:endParaRPr lang="en-US" sz="800" dirty="0"/>
           </a:p>
@@ -17313,7 +17532,7 @@
                 <a:ea typeface="Calibri" pitchFamily="34" charset="-122"/>
                 <a:cs typeface="Calibri" pitchFamily="34" charset="-120"/>
               </a:rPr>
-              <a:t>When you </a:t>
+              <a:t>During science, we had to </a:t>
             </a:r>
             <a:pPr algn="l" indent="0" marL="0">
               <a:buNone/>
@@ -17344,7 +17563,7 @@
                 <a:ea typeface="Calibri" pitchFamily="34" charset="-122"/>
                 <a:cs typeface="Calibri" pitchFamily="34" charset="-120"/>
               </a:rPr>
-              <a:t> a leaf, you can see each </a:t>
+              <a:t> a flower, record each </a:t>
             </a:r>
             <a:pPr algn="l" indent="0" marL="0">
               <a:buNone/>
@@ -17361,7 +17580,7 @@
                 <a:ea typeface="Calibri" pitchFamily="34" charset="-122"/>
                 <a:cs typeface="Calibri" pitchFamily="34" charset="-120"/>
               </a:rPr>
-              <a:t>section</a:t>
+              <a:t>sector</a:t>
             </a:r>
             <a:pPr algn="l" indent="0" marL="0">
               <a:buNone/>
@@ -17375,7 +17594,7 @@
                 <a:ea typeface="Calibri" pitchFamily="34" charset="-122"/>
                 <a:cs typeface="Calibri" pitchFamily="34" charset="-120"/>
               </a:rPr>
-              <a:t>, and the veins </a:t>
+              <a:t> of the petal, and note where the veins </a:t>
             </a:r>
             <a:pPr algn="l" indent="0" marL="0">
               <a:buNone/>
@@ -17406,7 +17625,7 @@
                 <a:ea typeface="Calibri" pitchFamily="34" charset="-122"/>
                 <a:cs typeface="Calibri" pitchFamily="34" charset="-120"/>
               </a:rPr>
-              <a:t> across the surface.</a:t>
+              <a:t>.</a:t>
             </a:r>
             <a:endParaRPr lang="en-US" sz="1800" dirty="0"/>
           </a:p>
@@ -17689,7 +17908,7 @@
                 <a:ea typeface="Trebuchet MS" pitchFamily="34" charset="-122"/>
                 <a:cs typeface="Trebuchet MS" pitchFamily="34" charset="-120"/>
               </a:rPr>
-              <a:t>section</a:t>
+              <a:t>sector</a:t>
             </a:r>
             <a:endParaRPr lang="en-US" sz="1400" dirty="0"/>
           </a:p>
@@ -18148,7 +18367,7 @@
                 <a:ea typeface="Calibri" pitchFamily="34" charset="-122"/>
                 <a:cs typeface="Calibri" pitchFamily="34" charset="-120"/>
               </a:rPr>
-              <a:t>Word Labs  •  wordlabs.app  •  Root: 'sec' = cut, divide, separate</a:t>
+              <a:t>Word Labs  •  wordlabs.app  •  Root: 'sec' = cut, divide, or separate</a:t>
             </a:r>
             <a:endParaRPr lang="en-US" sz="800" dirty="0"/>
           </a:p>
@@ -18975,7 +19194,7 @@
                 <a:ea typeface="Calibri" pitchFamily="34" charset="-122"/>
                 <a:cs typeface="Calibri" pitchFamily="34" charset="-120"/>
               </a:rPr>
-              <a:t>Word Labs  •  wordlabs.app  •  Root: 'sec' = cut, divide, separate</a:t>
+              <a:t>Word Labs  •  wordlabs.app  •  Root: 'sec' = cut, divide, or separate</a:t>
             </a:r>
             <a:endParaRPr lang="en-US" sz="800" dirty="0"/>
           </a:p>
@@ -19194,8 +19413,8 @@
         </p:nvSpPr>
         <p:spPr>
           <a:xfrm>
-            <a:off x="2221992" y="2258568"/>
-            <a:ext cx="1828800" cy="292608"/>
+            <a:off x="1989734" y="2258568"/>
+            <a:ext cx="1581912" cy="292608"/>
           </a:xfrm>
           <a:prstGeom prst="rect">
             <a:avLst>
@@ -19228,8 +19447,8 @@
         </p:nvSpPr>
         <p:spPr>
           <a:xfrm>
-            <a:off x="2221992" y="2258568"/>
-            <a:ext cx="1828800" cy="292608"/>
+            <a:off x="1989734" y="2258568"/>
+            <a:ext cx="1581912" cy="292608"/>
           </a:xfrm>
           <a:prstGeom prst="rect">
             <a:avLst/>
@@ -19267,8 +19486,8 @@
         </p:nvSpPr>
         <p:spPr>
           <a:xfrm>
-            <a:off x="2221992" y="2569464"/>
-            <a:ext cx="1828800" cy="201168"/>
+            <a:off x="1989734" y="2569464"/>
+            <a:ext cx="1581912" cy="201168"/>
           </a:xfrm>
           <a:prstGeom prst="rect">
             <a:avLst/>
@@ -19292,7 +19511,7 @@
                 <a:ea typeface="Calibri" pitchFamily="34" charset="-122"/>
                 <a:cs typeface="Calibri" pitchFamily="34" charset="-120"/>
               </a:rPr>
-              <a:t>apart, away</a:t>
+              <a:t>apart</a:t>
             </a:r>
             <a:endParaRPr lang="en-US" sz="850" dirty="0"/>
           </a:p>
@@ -19300,53 +19519,14 @@
       </p:sp>
       <p:sp>
         <p:nvSpPr>
-          <p:cNvPr id="19" name="Text 17"/>
-          <p:cNvSpPr/>
-          <p:nvPr/>
-        </p:nvSpPr>
-        <p:spPr>
-          <a:xfrm>
-            <a:off x="2221992" y="2752344"/>
-            <a:ext cx="1828800" cy="182880"/>
-          </a:xfrm>
-          <a:prstGeom prst="rect">
-            <a:avLst/>
-          </a:prstGeom>
-          <a:noFill/>
-          <a:ln/>
-        </p:spPr>
-        <p:txBody>
-          <a:bodyPr wrap="square" lIns="0" tIns="0" rIns="0" bIns="0" rtlCol="0" anchor="t"/>
-          <a:lstStyle/>
-          <a:p>
-            <a:pPr algn="ctr" indent="0" marL="0">
-              <a:buNone/>
-            </a:pPr>
-            <a:r>
-              <a:rPr lang="en-US" sz="700" i="1" dirty="0">
-                <a:solidFill>
-                  <a:srgbClr val="94A3B8"/>
-                </a:solidFill>
-                <a:latin typeface="Calibri" pitchFamily="34" charset="0"/>
-                <a:ea typeface="Calibri" pitchFamily="34" charset="-122"/>
-                <a:cs typeface="Calibri" pitchFamily="34" charset="-120"/>
-              </a:rPr>
-              <a:t>dis → di before some consonants</a:t>
-            </a:r>
-            <a:endParaRPr lang="en-US" sz="700" dirty="0"/>
-          </a:p>
-        </p:txBody>
-      </p:sp>
-      <p:sp>
-        <p:nvSpPr>
-          <p:cNvPr id="20" name="Shape 18"/>
-          <p:cNvSpPr/>
-          <p:nvPr/>
-        </p:nvSpPr>
-        <p:spPr>
-          <a:xfrm>
-            <a:off x="4370832" y="2258568"/>
-            <a:ext cx="1828800" cy="292608"/>
+          <p:cNvPr id="19" name="Shape 17"/>
+          <p:cNvSpPr/>
+          <p:nvPr/>
+        </p:nvSpPr>
+        <p:spPr>
+          <a:xfrm>
+            <a:off x="3659429" y="2258568"/>
+            <a:ext cx="1581912" cy="292608"/>
           </a:xfrm>
           <a:prstGeom prst="rect">
             <a:avLst>
@@ -19354,11 +19534,11 @@
             </a:avLst>
           </a:prstGeom>
           <a:solidFill>
-            <a:srgbClr val="CCFBF1"/>
+            <a:srgbClr val="FCE7F3"/>
           </a:solidFill>
           <a:ln w="19050">
             <a:solidFill>
-              <a:srgbClr val="0D9488"/>
+              <a:srgbClr val="DB2777"/>
             </a:solidFill>
             <a:prstDash val="solid"/>
           </a:ln>
@@ -19373,14 +19553,14 @@
       </p:sp>
       <p:sp>
         <p:nvSpPr>
-          <p:cNvPr id="21" name="Text 19"/>
-          <p:cNvSpPr/>
-          <p:nvPr/>
-        </p:nvSpPr>
-        <p:spPr>
-          <a:xfrm>
-            <a:off x="4370832" y="2258568"/>
-            <a:ext cx="1828800" cy="292608"/>
+          <p:cNvPr id="20" name="Text 18"/>
+          <p:cNvSpPr/>
+          <p:nvPr/>
+        </p:nvSpPr>
+        <p:spPr>
+          <a:xfrm>
+            <a:off x="3659429" y="2258568"/>
+            <a:ext cx="1581912" cy="292608"/>
           </a:xfrm>
           <a:prstGeom prst="rect">
             <a:avLst/>
@@ -19398,13 +19578,13 @@
             <a:r>
               <a:rPr lang="en-US" sz="1300" b="1" dirty="0">
                 <a:solidFill>
-                  <a:srgbClr val="0F766E"/>
+                  <a:srgbClr val="9D174D"/>
                 </a:solidFill>
                 <a:latin typeface="Trebuchet MS" pitchFamily="34" charset="0"/>
                 <a:ea typeface="Trebuchet MS" pitchFamily="34" charset="-122"/>
                 <a:cs typeface="Trebuchet MS" pitchFamily="34" charset="-120"/>
               </a:rPr>
-              <a:t>sec</a:t>
+              <a:t>s</a:t>
             </a:r>
             <a:endParaRPr lang="en-US" sz="1300" dirty="0"/>
           </a:p>
@@ -19412,14 +19592,14 @@
       </p:sp>
       <p:sp>
         <p:nvSpPr>
-          <p:cNvPr id="22" name="Text 20"/>
-          <p:cNvSpPr/>
-          <p:nvPr/>
-        </p:nvSpPr>
-        <p:spPr>
-          <a:xfrm>
-            <a:off x="4370832" y="2569464"/>
-            <a:ext cx="1828800" cy="201168"/>
+          <p:cNvPr id="21" name="Text 19"/>
+          <p:cNvSpPr/>
+          <p:nvPr/>
+        </p:nvSpPr>
+        <p:spPr>
+          <a:xfrm>
+            <a:off x="3659429" y="2569464"/>
+            <a:ext cx="1581912" cy="201168"/>
           </a:xfrm>
           <a:prstGeom prst="rect">
             <a:avLst/>
@@ -19443,7 +19623,7 @@
                 <a:ea typeface="Calibri" pitchFamily="34" charset="-122"/>
                 <a:cs typeface="Calibri" pitchFamily="34" charset="-120"/>
               </a:rPr>
-              <a:t>cut</a:t>
+              <a:t>connecting element</a:t>
             </a:r>
             <a:endParaRPr lang="en-US" sz="850" dirty="0"/>
           </a:p>
@@ -19451,14 +19631,53 @@
       </p:sp>
       <p:sp>
         <p:nvSpPr>
+          <p:cNvPr id="22" name="Text 20"/>
+          <p:cNvSpPr/>
+          <p:nvPr/>
+        </p:nvSpPr>
+        <p:spPr>
+          <a:xfrm>
+            <a:off x="3659429" y="2752344"/>
+            <a:ext cx="1581912" cy="182880"/>
+          </a:xfrm>
+          <a:prstGeom prst="rect">
+            <a:avLst/>
+          </a:prstGeom>
+          <a:noFill/>
+          <a:ln/>
+        </p:spPr>
+        <p:txBody>
+          <a:bodyPr wrap="square" lIns="0" tIns="0" rIns="0" bIns="0" rtlCol="0" anchor="t"/>
+          <a:lstStyle/>
+          <a:p>
+            <a:pPr algn="ctr" indent="0" marL="0">
+              <a:buNone/>
+            </a:pPr>
+            <a:r>
+              <a:rPr lang="en-US" sz="700" i="1" dirty="0">
+                <a:solidFill>
+                  <a:srgbClr val="94A3B8"/>
+                </a:solidFill>
+                <a:latin typeface="Calibri" pitchFamily="34" charset="0"/>
+                <a:ea typeface="Calibri" pitchFamily="34" charset="-122"/>
+                <a:cs typeface="Calibri" pitchFamily="34" charset="-120"/>
+              </a:rPr>
+              <a:t>spelling joins di + sec</a:t>
+            </a:r>
+            <a:endParaRPr lang="en-US" sz="700" dirty="0"/>
+          </a:p>
+        </p:txBody>
+      </p:sp>
+      <p:sp>
+        <p:nvSpPr>
           <p:cNvPr id="23" name="Shape 21"/>
           <p:cNvSpPr/>
           <p:nvPr/>
         </p:nvSpPr>
         <p:spPr>
           <a:xfrm>
-            <a:off x="6519672" y="2258568"/>
-            <a:ext cx="1828800" cy="292608"/>
+            <a:off x="5329123" y="2258568"/>
+            <a:ext cx="1581912" cy="292608"/>
           </a:xfrm>
           <a:prstGeom prst="rect">
             <a:avLst>
@@ -19466,11 +19685,11 @@
             </a:avLst>
           </a:prstGeom>
           <a:solidFill>
-            <a:srgbClr val="FCE7F3"/>
+            <a:srgbClr val="CCFBF1"/>
           </a:solidFill>
           <a:ln w="19050">
             <a:solidFill>
-              <a:srgbClr val="DB2777"/>
+              <a:srgbClr val="0D9488"/>
             </a:solidFill>
             <a:prstDash val="solid"/>
           </a:ln>
@@ -19491,8 +19710,8 @@
         </p:nvSpPr>
         <p:spPr>
           <a:xfrm>
-            <a:off x="6519672" y="2258568"/>
-            <a:ext cx="1828800" cy="292608"/>
+            <a:off x="5329123" y="2258568"/>
+            <a:ext cx="1581912" cy="292608"/>
           </a:xfrm>
           <a:prstGeom prst="rect">
             <a:avLst/>
@@ -19510,13 +19729,13 @@
             <a:r>
               <a:rPr lang="en-US" sz="1300" b="1" dirty="0">
                 <a:solidFill>
-                  <a:srgbClr val="9D174D"/>
+                  <a:srgbClr val="0F766E"/>
                 </a:solidFill>
                 <a:latin typeface="Trebuchet MS" pitchFamily="34" charset="0"/>
                 <a:ea typeface="Trebuchet MS" pitchFamily="34" charset="-122"/>
                 <a:cs typeface="Trebuchet MS" pitchFamily="34" charset="-120"/>
               </a:rPr>
-              <a:t>t</a:t>
+              <a:t>sec</a:t>
             </a:r>
             <a:endParaRPr lang="en-US" sz="1300" dirty="0"/>
           </a:p>
@@ -19530,8 +19749,8 @@
         </p:nvSpPr>
         <p:spPr>
           <a:xfrm>
-            <a:off x="6519672" y="2569464"/>
-            <a:ext cx="1828800" cy="201168"/>
+            <a:off x="5329123" y="2569464"/>
+            <a:ext cx="1581912" cy="201168"/>
           </a:xfrm>
           <a:prstGeom prst="rect">
             <a:avLst/>
@@ -19555,6 +19774,118 @@
                 <a:ea typeface="Calibri" pitchFamily="34" charset="-122"/>
                 <a:cs typeface="Calibri" pitchFamily="34" charset="-120"/>
               </a:rPr>
+              <a:t>cut</a:t>
+            </a:r>
+            <a:endParaRPr lang="en-US" sz="850" dirty="0"/>
+          </a:p>
+        </p:txBody>
+      </p:sp>
+      <p:sp>
+        <p:nvSpPr>
+          <p:cNvPr id="26" name="Shape 24"/>
+          <p:cNvSpPr/>
+          <p:nvPr/>
+        </p:nvSpPr>
+        <p:spPr>
+          <a:xfrm>
+            <a:off x="6998818" y="2258568"/>
+            <a:ext cx="1581912" cy="292608"/>
+          </a:xfrm>
+          <a:prstGeom prst="rect">
+            <a:avLst>
+              <a:gd name="adj" fmla="val 25000"/>
+            </a:avLst>
+          </a:prstGeom>
+          <a:solidFill>
+            <a:srgbClr val="FCE7F3"/>
+          </a:solidFill>
+          <a:ln w="19050">
+            <a:solidFill>
+              <a:srgbClr val="DB2777"/>
+            </a:solidFill>
+            <a:prstDash val="solid"/>
+          </a:ln>
+          <a:effectLst>
+            <a:outerShdw sx="100000" sy="100000" kx="0" ky="0" algn="bl" rotWithShape="0" blurRad="101600" dist="38100" dir="8100000">
+              <a:srgbClr val="000000">
+                <a:alpha val="12000"/>
+              </a:srgbClr>
+            </a:outerShdw>
+          </a:effectLst>
+        </p:spPr>
+      </p:sp>
+      <p:sp>
+        <p:nvSpPr>
+          <p:cNvPr id="27" name="Text 25"/>
+          <p:cNvSpPr/>
+          <p:nvPr/>
+        </p:nvSpPr>
+        <p:spPr>
+          <a:xfrm>
+            <a:off x="6998818" y="2258568"/>
+            <a:ext cx="1581912" cy="292608"/>
+          </a:xfrm>
+          <a:prstGeom prst="rect">
+            <a:avLst/>
+          </a:prstGeom>
+          <a:noFill/>
+          <a:ln/>
+        </p:spPr>
+        <p:txBody>
+          <a:bodyPr wrap="square" lIns="0" tIns="0" rIns="0" bIns="0" rtlCol="0" anchor="ctr"/>
+          <a:lstStyle/>
+          <a:p>
+            <a:pPr algn="ctr" indent="0" marL="0">
+              <a:buNone/>
+            </a:pPr>
+            <a:r>
+              <a:rPr lang="en-US" sz="1300" b="1" dirty="0">
+                <a:solidFill>
+                  <a:srgbClr val="9D174D"/>
+                </a:solidFill>
+                <a:latin typeface="Trebuchet MS" pitchFamily="34" charset="0"/>
+                <a:ea typeface="Trebuchet MS" pitchFamily="34" charset="-122"/>
+                <a:cs typeface="Trebuchet MS" pitchFamily="34" charset="-120"/>
+              </a:rPr>
+              <a:t>t</a:t>
+            </a:r>
+            <a:endParaRPr lang="en-US" sz="1300" dirty="0"/>
+          </a:p>
+        </p:txBody>
+      </p:sp>
+      <p:sp>
+        <p:nvSpPr>
+          <p:cNvPr id="28" name="Text 26"/>
+          <p:cNvSpPr/>
+          <p:nvPr/>
+        </p:nvSpPr>
+        <p:spPr>
+          <a:xfrm>
+            <a:off x="6998818" y="2569464"/>
+            <a:ext cx="1581912" cy="201168"/>
+          </a:xfrm>
+          <a:prstGeom prst="rect">
+            <a:avLst/>
+          </a:prstGeom>
+          <a:noFill/>
+          <a:ln/>
+        </p:spPr>
+        <p:txBody>
+          <a:bodyPr wrap="square" lIns="0" tIns="0" rIns="0" bIns="0" rtlCol="0" anchor="t"/>
+          <a:lstStyle/>
+          <a:p>
+            <a:pPr algn="ctr" indent="0" marL="0">
+              <a:buNone/>
+            </a:pPr>
+            <a:r>
+              <a:rPr lang="en-US" sz="850" dirty="0">
+                <a:solidFill>
+                  <a:srgbClr val="475569"/>
+                </a:solidFill>
+                <a:latin typeface="Calibri" pitchFamily="34" charset="0"/>
+                <a:ea typeface="Calibri" pitchFamily="34" charset="-122"/>
+                <a:cs typeface="Calibri" pitchFamily="34" charset="-120"/>
+              </a:rPr>
               <a:t>verb-forming ending</a:t>
             </a:r>
             <a:endParaRPr lang="en-US" sz="850" dirty="0"/>
@@ -19563,7 +19894,7 @@
       </p:sp>
       <p:sp>
         <p:nvSpPr>
-          <p:cNvPr id="26" name="Shape 24"/>
+          <p:cNvPr id="29" name="Shape 27"/>
           <p:cNvSpPr/>
           <p:nvPr/>
         </p:nvSpPr>
@@ -19590,7 +19921,7 @@
       </p:sp>
       <p:sp>
         <p:nvSpPr>
-          <p:cNvPr id="27" name="Text 25"/>
+          <p:cNvPr id="30" name="Text 28"/>
           <p:cNvSpPr/>
           <p:nvPr/>
         </p:nvSpPr>
@@ -19629,7 +19960,7 @@
       </p:sp>
       <p:sp>
         <p:nvSpPr>
-          <p:cNvPr id="28" name="Shape 26"/>
+          <p:cNvPr id="31" name="Shape 29"/>
           <p:cNvSpPr/>
           <p:nvPr/>
         </p:nvSpPr>
@@ -19656,7 +19987,7 @@
       </p:sp>
       <p:sp>
         <p:nvSpPr>
-          <p:cNvPr id="29" name="Text 27"/>
+          <p:cNvPr id="32" name="Text 30"/>
           <p:cNvSpPr/>
           <p:nvPr/>
         </p:nvSpPr>
@@ -19695,7 +20026,7 @@
       </p:sp>
       <p:sp>
         <p:nvSpPr>
-          <p:cNvPr id="30" name="Shape 28"/>
+          <p:cNvPr id="33" name="Shape 31"/>
           <p:cNvSpPr/>
           <p:nvPr/>
         </p:nvSpPr>
@@ -19722,7 +20053,7 @@
       </p:sp>
       <p:sp>
         <p:nvSpPr>
-          <p:cNvPr id="31" name="Text 29"/>
+          <p:cNvPr id="34" name="Text 32"/>
           <p:cNvSpPr/>
           <p:nvPr/>
         </p:nvSpPr>
@@ -19761,7 +20092,7 @@
       </p:sp>
       <p:sp>
         <p:nvSpPr>
-          <p:cNvPr id="32" name="Shape 30"/>
+          <p:cNvPr id="35" name="Shape 33"/>
           <p:cNvSpPr/>
           <p:nvPr/>
         </p:nvSpPr>
@@ -19788,7 +20119,7 @@
       </p:sp>
       <p:sp>
         <p:nvSpPr>
-          <p:cNvPr id="33" name="Text 31"/>
+          <p:cNvPr id="36" name="Text 34"/>
           <p:cNvSpPr/>
           <p:nvPr/>
         </p:nvSpPr>
@@ -20111,7 +20442,7 @@
                 <a:ea typeface="Calibri" pitchFamily="34" charset="-122"/>
                 <a:cs typeface="Calibri" pitchFamily="34" charset="-120"/>
               </a:rPr>
-              <a:t>Word Labs  •  wordlabs.app  •  Root: 'sec' = cut, divide, separate</a:t>
+              <a:t>Word Labs  •  wordlabs.app  •  Root: 'sec' = cut, divide, or separate</a:t>
             </a:r>
             <a:endParaRPr lang="en-US" sz="800" dirty="0"/>
           </a:p>
@@ -20330,8 +20661,8 @@
         </p:nvSpPr>
         <p:spPr>
           <a:xfrm>
-            <a:off x="2221992" y="2258568"/>
-            <a:ext cx="1828800" cy="292608"/>
+            <a:off x="1989734" y="2258568"/>
+            <a:ext cx="1581912" cy="292608"/>
           </a:xfrm>
           <a:prstGeom prst="rect">
             <a:avLst>
@@ -20364,8 +20695,8 @@
         </p:nvSpPr>
         <p:spPr>
           <a:xfrm>
-            <a:off x="2221992" y="2258568"/>
-            <a:ext cx="1828800" cy="292608"/>
+            <a:off x="1989734" y="2258568"/>
+            <a:ext cx="1581912" cy="292608"/>
           </a:xfrm>
           <a:prstGeom prst="rect">
             <a:avLst/>
@@ -20403,8 +20734,8 @@
         </p:nvSpPr>
         <p:spPr>
           <a:xfrm>
-            <a:off x="2221992" y="2569464"/>
-            <a:ext cx="1828800" cy="201168"/>
+            <a:off x="1989734" y="2569464"/>
+            <a:ext cx="1581912" cy="201168"/>
           </a:xfrm>
           <a:prstGeom prst="rect">
             <a:avLst/>
@@ -20428,7 +20759,7 @@
                 <a:ea typeface="Calibri" pitchFamily="34" charset="-122"/>
                 <a:cs typeface="Calibri" pitchFamily="34" charset="-120"/>
               </a:rPr>
-              <a:t>apart, away</a:t>
+              <a:t>apart</a:t>
             </a:r>
             <a:endParaRPr lang="en-US" sz="850" dirty="0"/>
           </a:p>
@@ -20436,53 +20767,14 @@
       </p:sp>
       <p:sp>
         <p:nvSpPr>
-          <p:cNvPr id="19" name="Text 17"/>
-          <p:cNvSpPr/>
-          <p:nvPr/>
-        </p:nvSpPr>
-        <p:spPr>
-          <a:xfrm>
-            <a:off x="2221992" y="2752344"/>
-            <a:ext cx="1828800" cy="182880"/>
-          </a:xfrm>
-          <a:prstGeom prst="rect">
-            <a:avLst/>
-          </a:prstGeom>
-          <a:noFill/>
-          <a:ln/>
-        </p:spPr>
-        <p:txBody>
-          <a:bodyPr wrap="square" lIns="0" tIns="0" rIns="0" bIns="0" rtlCol="0" anchor="t"/>
-          <a:lstStyle/>
-          <a:p>
-            <a:pPr algn="ctr" indent="0" marL="0">
-              <a:buNone/>
-            </a:pPr>
-            <a:r>
-              <a:rPr lang="en-US" sz="700" i="1" dirty="0">
-                <a:solidFill>
-                  <a:srgbClr val="94A3B8"/>
-                </a:solidFill>
-                <a:latin typeface="Calibri" pitchFamily="34" charset="0"/>
-                <a:ea typeface="Calibri" pitchFamily="34" charset="-122"/>
-                <a:cs typeface="Calibri" pitchFamily="34" charset="-120"/>
-              </a:rPr>
-              <a:t>dis → di before some consonants</a:t>
-            </a:r>
-            <a:endParaRPr lang="en-US" sz="700" dirty="0"/>
-          </a:p>
-        </p:txBody>
-      </p:sp>
-      <p:sp>
-        <p:nvSpPr>
-          <p:cNvPr id="20" name="Shape 18"/>
-          <p:cNvSpPr/>
-          <p:nvPr/>
-        </p:nvSpPr>
-        <p:spPr>
-          <a:xfrm>
-            <a:off x="4370832" y="2258568"/>
-            <a:ext cx="1828800" cy="292608"/>
+          <p:cNvPr id="19" name="Shape 17"/>
+          <p:cNvSpPr/>
+          <p:nvPr/>
+        </p:nvSpPr>
+        <p:spPr>
+          <a:xfrm>
+            <a:off x="3659429" y="2258568"/>
+            <a:ext cx="1581912" cy="292608"/>
           </a:xfrm>
           <a:prstGeom prst="rect">
             <a:avLst>
@@ -20490,11 +20782,11 @@
             </a:avLst>
           </a:prstGeom>
           <a:solidFill>
-            <a:srgbClr val="CCFBF1"/>
+            <a:srgbClr val="FCE7F3"/>
           </a:solidFill>
           <a:ln w="19050">
             <a:solidFill>
-              <a:srgbClr val="0D9488"/>
+              <a:srgbClr val="DB2777"/>
             </a:solidFill>
             <a:prstDash val="solid"/>
           </a:ln>
@@ -20509,14 +20801,14 @@
       </p:sp>
       <p:sp>
         <p:nvSpPr>
-          <p:cNvPr id="21" name="Text 19"/>
-          <p:cNvSpPr/>
-          <p:nvPr/>
-        </p:nvSpPr>
-        <p:spPr>
-          <a:xfrm>
-            <a:off x="4370832" y="2258568"/>
-            <a:ext cx="1828800" cy="292608"/>
+          <p:cNvPr id="20" name="Text 18"/>
+          <p:cNvSpPr/>
+          <p:nvPr/>
+        </p:nvSpPr>
+        <p:spPr>
+          <a:xfrm>
+            <a:off x="3659429" y="2258568"/>
+            <a:ext cx="1581912" cy="292608"/>
           </a:xfrm>
           <a:prstGeom prst="rect">
             <a:avLst/>
@@ -20534,13 +20826,13 @@
             <a:r>
               <a:rPr lang="en-US" sz="1300" b="1" dirty="0">
                 <a:solidFill>
-                  <a:srgbClr val="0F766E"/>
+                  <a:srgbClr val="9D174D"/>
                 </a:solidFill>
                 <a:latin typeface="Trebuchet MS" pitchFamily="34" charset="0"/>
                 <a:ea typeface="Trebuchet MS" pitchFamily="34" charset="-122"/>
                 <a:cs typeface="Trebuchet MS" pitchFamily="34" charset="-120"/>
               </a:rPr>
-              <a:t>sec</a:t>
+              <a:t>s</a:t>
             </a:r>
             <a:endParaRPr lang="en-US" sz="1300" dirty="0"/>
           </a:p>
@@ -20548,14 +20840,14 @@
       </p:sp>
       <p:sp>
         <p:nvSpPr>
-          <p:cNvPr id="22" name="Text 20"/>
-          <p:cNvSpPr/>
-          <p:nvPr/>
-        </p:nvSpPr>
-        <p:spPr>
-          <a:xfrm>
-            <a:off x="4370832" y="2569464"/>
-            <a:ext cx="1828800" cy="201168"/>
+          <p:cNvPr id="21" name="Text 19"/>
+          <p:cNvSpPr/>
+          <p:nvPr/>
+        </p:nvSpPr>
+        <p:spPr>
+          <a:xfrm>
+            <a:off x="3659429" y="2569464"/>
+            <a:ext cx="1581912" cy="201168"/>
           </a:xfrm>
           <a:prstGeom prst="rect">
             <a:avLst/>
@@ -20579,7 +20871,7 @@
                 <a:ea typeface="Calibri" pitchFamily="34" charset="-122"/>
                 <a:cs typeface="Calibri" pitchFamily="34" charset="-120"/>
               </a:rPr>
-              <a:t>cut</a:t>
+              <a:t>connecting element</a:t>
             </a:r>
             <a:endParaRPr lang="en-US" sz="850" dirty="0"/>
           </a:p>
@@ -20587,14 +20879,53 @@
       </p:sp>
       <p:sp>
         <p:nvSpPr>
+          <p:cNvPr id="22" name="Text 20"/>
+          <p:cNvSpPr/>
+          <p:nvPr/>
+        </p:nvSpPr>
+        <p:spPr>
+          <a:xfrm>
+            <a:off x="3659429" y="2752344"/>
+            <a:ext cx="1581912" cy="182880"/>
+          </a:xfrm>
+          <a:prstGeom prst="rect">
+            <a:avLst/>
+          </a:prstGeom>
+          <a:noFill/>
+          <a:ln/>
+        </p:spPr>
+        <p:txBody>
+          <a:bodyPr wrap="square" lIns="0" tIns="0" rIns="0" bIns="0" rtlCol="0" anchor="t"/>
+          <a:lstStyle/>
+          <a:p>
+            <a:pPr algn="ctr" indent="0" marL="0">
+              <a:buNone/>
+            </a:pPr>
+            <a:r>
+              <a:rPr lang="en-US" sz="700" i="1" dirty="0">
+                <a:solidFill>
+                  <a:srgbClr val="94A3B8"/>
+                </a:solidFill>
+                <a:latin typeface="Calibri" pitchFamily="34" charset="0"/>
+                <a:ea typeface="Calibri" pitchFamily="34" charset="-122"/>
+                <a:cs typeface="Calibri" pitchFamily="34" charset="-120"/>
+              </a:rPr>
+              <a:t>spelling joins di + sec</a:t>
+            </a:r>
+            <a:endParaRPr lang="en-US" sz="700" dirty="0"/>
+          </a:p>
+        </p:txBody>
+      </p:sp>
+      <p:sp>
+        <p:nvSpPr>
           <p:cNvPr id="23" name="Shape 21"/>
           <p:cNvSpPr/>
           <p:nvPr/>
         </p:nvSpPr>
         <p:spPr>
           <a:xfrm>
-            <a:off x="6519672" y="2258568"/>
-            <a:ext cx="1828800" cy="292608"/>
+            <a:off x="5329123" y="2258568"/>
+            <a:ext cx="1581912" cy="292608"/>
           </a:xfrm>
           <a:prstGeom prst="rect">
             <a:avLst>
@@ -20602,11 +20933,11 @@
             </a:avLst>
           </a:prstGeom>
           <a:solidFill>
-            <a:srgbClr val="FCE7F3"/>
+            <a:srgbClr val="CCFBF1"/>
           </a:solidFill>
           <a:ln w="19050">
             <a:solidFill>
-              <a:srgbClr val="DB2777"/>
+              <a:srgbClr val="0D9488"/>
             </a:solidFill>
             <a:prstDash val="solid"/>
           </a:ln>
@@ -20627,8 +20958,8 @@
         </p:nvSpPr>
         <p:spPr>
           <a:xfrm>
-            <a:off x="6519672" y="2258568"/>
-            <a:ext cx="1828800" cy="292608"/>
+            <a:off x="5329123" y="2258568"/>
+            <a:ext cx="1581912" cy="292608"/>
           </a:xfrm>
           <a:prstGeom prst="rect">
             <a:avLst/>
@@ -20646,13 +20977,13 @@
             <a:r>
               <a:rPr lang="en-US" sz="1300" b="1" dirty="0">
                 <a:solidFill>
-                  <a:srgbClr val="9D174D"/>
+                  <a:srgbClr val="0F766E"/>
                 </a:solidFill>
                 <a:latin typeface="Trebuchet MS" pitchFamily="34" charset="0"/>
                 <a:ea typeface="Trebuchet MS" pitchFamily="34" charset="-122"/>
                 <a:cs typeface="Trebuchet MS" pitchFamily="34" charset="-120"/>
               </a:rPr>
-              <a:t>t</a:t>
+              <a:t>sec</a:t>
             </a:r>
             <a:endParaRPr lang="en-US" sz="1300" dirty="0"/>
           </a:p>
@@ -20666,8 +20997,8 @@
         </p:nvSpPr>
         <p:spPr>
           <a:xfrm>
-            <a:off x="6519672" y="2569464"/>
-            <a:ext cx="1828800" cy="201168"/>
+            <a:off x="5329123" y="2569464"/>
+            <a:ext cx="1581912" cy="201168"/>
           </a:xfrm>
           <a:prstGeom prst="rect">
             <a:avLst/>
@@ -20691,6 +21022,118 @@
                 <a:ea typeface="Calibri" pitchFamily="34" charset="-122"/>
                 <a:cs typeface="Calibri" pitchFamily="34" charset="-120"/>
               </a:rPr>
+              <a:t>cut</a:t>
+            </a:r>
+            <a:endParaRPr lang="en-US" sz="850" dirty="0"/>
+          </a:p>
+        </p:txBody>
+      </p:sp>
+      <p:sp>
+        <p:nvSpPr>
+          <p:cNvPr id="26" name="Shape 24"/>
+          <p:cNvSpPr/>
+          <p:nvPr/>
+        </p:nvSpPr>
+        <p:spPr>
+          <a:xfrm>
+            <a:off x="6998818" y="2258568"/>
+            <a:ext cx="1581912" cy="292608"/>
+          </a:xfrm>
+          <a:prstGeom prst="rect">
+            <a:avLst>
+              <a:gd name="adj" fmla="val 25000"/>
+            </a:avLst>
+          </a:prstGeom>
+          <a:solidFill>
+            <a:srgbClr val="FCE7F3"/>
+          </a:solidFill>
+          <a:ln w="19050">
+            <a:solidFill>
+              <a:srgbClr val="DB2777"/>
+            </a:solidFill>
+            <a:prstDash val="solid"/>
+          </a:ln>
+          <a:effectLst>
+            <a:outerShdw sx="100000" sy="100000" kx="0" ky="0" algn="bl" rotWithShape="0" blurRad="101600" dist="38100" dir="8100000">
+              <a:srgbClr val="000000">
+                <a:alpha val="12000"/>
+              </a:srgbClr>
+            </a:outerShdw>
+          </a:effectLst>
+        </p:spPr>
+      </p:sp>
+      <p:sp>
+        <p:nvSpPr>
+          <p:cNvPr id="27" name="Text 25"/>
+          <p:cNvSpPr/>
+          <p:nvPr/>
+        </p:nvSpPr>
+        <p:spPr>
+          <a:xfrm>
+            <a:off x="6998818" y="2258568"/>
+            <a:ext cx="1581912" cy="292608"/>
+          </a:xfrm>
+          <a:prstGeom prst="rect">
+            <a:avLst/>
+          </a:prstGeom>
+          <a:noFill/>
+          <a:ln/>
+        </p:spPr>
+        <p:txBody>
+          <a:bodyPr wrap="square" lIns="0" tIns="0" rIns="0" bIns="0" rtlCol="0" anchor="ctr"/>
+          <a:lstStyle/>
+          <a:p>
+            <a:pPr algn="ctr" indent="0" marL="0">
+              <a:buNone/>
+            </a:pPr>
+            <a:r>
+              <a:rPr lang="en-US" sz="1300" b="1" dirty="0">
+                <a:solidFill>
+                  <a:srgbClr val="9D174D"/>
+                </a:solidFill>
+                <a:latin typeface="Trebuchet MS" pitchFamily="34" charset="0"/>
+                <a:ea typeface="Trebuchet MS" pitchFamily="34" charset="-122"/>
+                <a:cs typeface="Trebuchet MS" pitchFamily="34" charset="-120"/>
+              </a:rPr>
+              <a:t>t</a:t>
+            </a:r>
+            <a:endParaRPr lang="en-US" sz="1300" dirty="0"/>
+          </a:p>
+        </p:txBody>
+      </p:sp>
+      <p:sp>
+        <p:nvSpPr>
+          <p:cNvPr id="28" name="Text 26"/>
+          <p:cNvSpPr/>
+          <p:nvPr/>
+        </p:nvSpPr>
+        <p:spPr>
+          <a:xfrm>
+            <a:off x="6998818" y="2569464"/>
+            <a:ext cx="1581912" cy="201168"/>
+          </a:xfrm>
+          <a:prstGeom prst="rect">
+            <a:avLst/>
+          </a:prstGeom>
+          <a:noFill/>
+          <a:ln/>
+        </p:spPr>
+        <p:txBody>
+          <a:bodyPr wrap="square" lIns="0" tIns="0" rIns="0" bIns="0" rtlCol="0" anchor="t"/>
+          <a:lstStyle/>
+          <a:p>
+            <a:pPr algn="ctr" indent="0" marL="0">
+              <a:buNone/>
+            </a:pPr>
+            <a:r>
+              <a:rPr lang="en-US" sz="850" dirty="0">
+                <a:solidFill>
+                  <a:srgbClr val="475569"/>
+                </a:solidFill>
+                <a:latin typeface="Calibri" pitchFamily="34" charset="0"/>
+                <a:ea typeface="Calibri" pitchFamily="34" charset="-122"/>
+                <a:cs typeface="Calibri" pitchFamily="34" charset="-120"/>
+              </a:rPr>
               <a:t>verb-forming ending</a:t>
             </a:r>
             <a:endParaRPr lang="en-US" sz="850" dirty="0"/>
@@ -20699,7 +21142,7 @@
       </p:sp>
       <p:sp>
         <p:nvSpPr>
-          <p:cNvPr id="26" name="Shape 24"/>
+          <p:cNvPr id="29" name="Shape 27"/>
           <p:cNvSpPr/>
           <p:nvPr/>
         </p:nvSpPr>
@@ -20726,7 +21169,7 @@
       </p:sp>
       <p:sp>
         <p:nvSpPr>
-          <p:cNvPr id="27" name="Text 25"/>
+          <p:cNvPr id="30" name="Text 28"/>
           <p:cNvSpPr/>
           <p:nvPr/>
         </p:nvSpPr>
@@ -20765,7 +21208,7 @@
       </p:sp>
       <p:sp>
         <p:nvSpPr>
-          <p:cNvPr id="28" name="Shape 26"/>
+          <p:cNvPr id="31" name="Shape 29"/>
           <p:cNvSpPr/>
           <p:nvPr/>
         </p:nvSpPr>
@@ -20792,7 +21235,7 @@
       </p:sp>
       <p:sp>
         <p:nvSpPr>
-          <p:cNvPr id="29" name="Shape 27"/>
+          <p:cNvPr id="32" name="Shape 30"/>
           <p:cNvSpPr/>
           <p:nvPr/>
         </p:nvSpPr>
@@ -20819,7 +21262,7 @@
       </p:sp>
       <p:sp>
         <p:nvSpPr>
-          <p:cNvPr id="30" name="Text 28"/>
+          <p:cNvPr id="33" name="Text 31"/>
           <p:cNvSpPr/>
           <p:nvPr/>
         </p:nvSpPr>
@@ -20858,7 +21301,7 @@
       </p:sp>
       <p:sp>
         <p:nvSpPr>
-          <p:cNvPr id="31" name="Text 29"/>
+          <p:cNvPr id="34" name="Text 32"/>
           <p:cNvSpPr/>
           <p:nvPr/>
         </p:nvSpPr>
@@ -20897,7 +21340,7 @@
       </p:sp>
       <p:sp>
         <p:nvSpPr>
-          <p:cNvPr id="32" name="Shape 30"/>
+          <p:cNvPr id="35" name="Shape 33"/>
           <p:cNvSpPr/>
           <p:nvPr/>
         </p:nvSpPr>
@@ -20924,7 +21367,7 @@
       </p:sp>
       <p:sp>
         <p:nvSpPr>
-          <p:cNvPr id="33" name="Text 31"/>
+          <p:cNvPr id="36" name="Text 34"/>
           <p:cNvSpPr/>
           <p:nvPr/>
         </p:nvSpPr>
@@ -20963,7 +21406,7 @@
       </p:sp>
       <p:sp>
         <p:nvSpPr>
-          <p:cNvPr id="34" name="Shape 32"/>
+          <p:cNvPr id="37" name="Shape 35"/>
           <p:cNvSpPr/>
           <p:nvPr/>
         </p:nvSpPr>
@@ -20990,7 +21433,7 @@
       </p:sp>
       <p:sp>
         <p:nvSpPr>
-          <p:cNvPr id="35" name="Text 33"/>
+          <p:cNvPr id="38" name="Text 36"/>
           <p:cNvSpPr/>
           <p:nvPr/>
         </p:nvSpPr>
@@ -21029,7 +21472,7 @@
       </p:sp>
       <p:sp>
         <p:nvSpPr>
-          <p:cNvPr id="36" name="Shape 34"/>
+          <p:cNvPr id="39" name="Shape 37"/>
           <p:cNvSpPr/>
           <p:nvPr/>
         </p:nvSpPr>
@@ -21056,7 +21499,7 @@
       </p:sp>
       <p:sp>
         <p:nvSpPr>
-          <p:cNvPr id="37" name="Text 35"/>
+          <p:cNvPr id="40" name="Text 38"/>
           <p:cNvSpPr/>
           <p:nvPr/>
         </p:nvSpPr>
@@ -21379,7 +21822,7 @@
                 <a:ea typeface="Calibri" pitchFamily="34" charset="-122"/>
                 <a:cs typeface="Calibri" pitchFamily="34" charset="-120"/>
               </a:rPr>
-              <a:t>Word Labs  •  wordlabs.app  •  Root: 'sec' = cut, divide, separate</a:t>
+              <a:t>Word Labs  •  wordlabs.app  •  Root: 'sec' = cut, divide, or separate</a:t>
             </a:r>
             <a:endParaRPr lang="en-US" sz="800" dirty="0"/>
           </a:p>
@@ -21598,8 +22041,8 @@
         </p:nvSpPr>
         <p:spPr>
           <a:xfrm>
-            <a:off x="2221992" y="2258568"/>
-            <a:ext cx="1828800" cy="292608"/>
+            <a:off x="1989734" y="2258568"/>
+            <a:ext cx="1581912" cy="292608"/>
           </a:xfrm>
           <a:prstGeom prst="rect">
             <a:avLst>
@@ -21632,8 +22075,8 @@
         </p:nvSpPr>
         <p:spPr>
           <a:xfrm>
-            <a:off x="2221992" y="2258568"/>
-            <a:ext cx="1828800" cy="292608"/>
+            <a:off x="1989734" y="2258568"/>
+            <a:ext cx="1581912" cy="292608"/>
           </a:xfrm>
           <a:prstGeom prst="rect">
             <a:avLst/>
@@ -21671,8 +22114,8 @@
         </p:nvSpPr>
         <p:spPr>
           <a:xfrm>
-            <a:off x="2221992" y="2569464"/>
-            <a:ext cx="1828800" cy="201168"/>
+            <a:off x="1989734" y="2569464"/>
+            <a:ext cx="1581912" cy="201168"/>
           </a:xfrm>
           <a:prstGeom prst="rect">
             <a:avLst/>
@@ -21696,7 +22139,7 @@
                 <a:ea typeface="Calibri" pitchFamily="34" charset="-122"/>
                 <a:cs typeface="Calibri" pitchFamily="34" charset="-120"/>
               </a:rPr>
-              <a:t>apart, away</a:t>
+              <a:t>apart</a:t>
             </a:r>
             <a:endParaRPr lang="en-US" sz="850" dirty="0"/>
           </a:p>
@@ -21704,53 +22147,14 @@
       </p:sp>
       <p:sp>
         <p:nvSpPr>
-          <p:cNvPr id="19" name="Text 17"/>
-          <p:cNvSpPr/>
-          <p:nvPr/>
-        </p:nvSpPr>
-        <p:spPr>
-          <a:xfrm>
-            <a:off x="2221992" y="2752344"/>
-            <a:ext cx="1828800" cy="182880"/>
-          </a:xfrm>
-          <a:prstGeom prst="rect">
-            <a:avLst/>
-          </a:prstGeom>
-          <a:noFill/>
-          <a:ln/>
-        </p:spPr>
-        <p:txBody>
-          <a:bodyPr wrap="square" lIns="0" tIns="0" rIns="0" bIns="0" rtlCol="0" anchor="t"/>
-          <a:lstStyle/>
-          <a:p>
-            <a:pPr algn="ctr" indent="0" marL="0">
-              <a:buNone/>
-            </a:pPr>
-            <a:r>
-              <a:rPr lang="en-US" sz="700" i="1" dirty="0">
-                <a:solidFill>
-                  <a:srgbClr val="94A3B8"/>
-                </a:solidFill>
-                <a:latin typeface="Calibri" pitchFamily="34" charset="0"/>
-                <a:ea typeface="Calibri" pitchFamily="34" charset="-122"/>
-                <a:cs typeface="Calibri" pitchFamily="34" charset="-120"/>
-              </a:rPr>
-              <a:t>dis → di before some consonants</a:t>
-            </a:r>
-            <a:endParaRPr lang="en-US" sz="700" dirty="0"/>
-          </a:p>
-        </p:txBody>
-      </p:sp>
-      <p:sp>
-        <p:nvSpPr>
-          <p:cNvPr id="20" name="Shape 18"/>
-          <p:cNvSpPr/>
-          <p:nvPr/>
-        </p:nvSpPr>
-        <p:spPr>
-          <a:xfrm>
-            <a:off x="4370832" y="2258568"/>
-            <a:ext cx="1828800" cy="292608"/>
+          <p:cNvPr id="19" name="Shape 17"/>
+          <p:cNvSpPr/>
+          <p:nvPr/>
+        </p:nvSpPr>
+        <p:spPr>
+          <a:xfrm>
+            <a:off x="3659429" y="2258568"/>
+            <a:ext cx="1581912" cy="292608"/>
           </a:xfrm>
           <a:prstGeom prst="rect">
             <a:avLst>
@@ -21758,11 +22162,11 @@
             </a:avLst>
           </a:prstGeom>
           <a:solidFill>
-            <a:srgbClr val="CCFBF1"/>
+            <a:srgbClr val="FCE7F3"/>
           </a:solidFill>
           <a:ln w="19050">
             <a:solidFill>
-              <a:srgbClr val="0D9488"/>
+              <a:srgbClr val="DB2777"/>
             </a:solidFill>
             <a:prstDash val="solid"/>
           </a:ln>
@@ -21777,14 +22181,14 @@
       </p:sp>
       <p:sp>
         <p:nvSpPr>
-          <p:cNvPr id="21" name="Text 19"/>
-          <p:cNvSpPr/>
-          <p:nvPr/>
-        </p:nvSpPr>
-        <p:spPr>
-          <a:xfrm>
-            <a:off x="4370832" y="2258568"/>
-            <a:ext cx="1828800" cy="292608"/>
+          <p:cNvPr id="20" name="Text 18"/>
+          <p:cNvSpPr/>
+          <p:nvPr/>
+        </p:nvSpPr>
+        <p:spPr>
+          <a:xfrm>
+            <a:off x="3659429" y="2258568"/>
+            <a:ext cx="1581912" cy="292608"/>
           </a:xfrm>
           <a:prstGeom prst="rect">
             <a:avLst/>
@@ -21802,13 +22206,13 @@
             <a:r>
               <a:rPr lang="en-US" sz="1300" b="1" dirty="0">
                 <a:solidFill>
-                  <a:srgbClr val="0F766E"/>
+                  <a:srgbClr val="9D174D"/>
                 </a:solidFill>
                 <a:latin typeface="Trebuchet MS" pitchFamily="34" charset="0"/>
                 <a:ea typeface="Trebuchet MS" pitchFamily="34" charset="-122"/>
                 <a:cs typeface="Trebuchet MS" pitchFamily="34" charset="-120"/>
               </a:rPr>
-              <a:t>sec</a:t>
+              <a:t>s</a:t>
             </a:r>
             <a:endParaRPr lang="en-US" sz="1300" dirty="0"/>
           </a:p>
@@ -21816,14 +22220,14 @@
       </p:sp>
       <p:sp>
         <p:nvSpPr>
-          <p:cNvPr id="22" name="Text 20"/>
-          <p:cNvSpPr/>
-          <p:nvPr/>
-        </p:nvSpPr>
-        <p:spPr>
-          <a:xfrm>
-            <a:off x="4370832" y="2569464"/>
-            <a:ext cx="1828800" cy="201168"/>
+          <p:cNvPr id="21" name="Text 19"/>
+          <p:cNvSpPr/>
+          <p:nvPr/>
+        </p:nvSpPr>
+        <p:spPr>
+          <a:xfrm>
+            <a:off x="3659429" y="2569464"/>
+            <a:ext cx="1581912" cy="201168"/>
           </a:xfrm>
           <a:prstGeom prst="rect">
             <a:avLst/>
@@ -21847,7 +22251,7 @@
                 <a:ea typeface="Calibri" pitchFamily="34" charset="-122"/>
                 <a:cs typeface="Calibri" pitchFamily="34" charset="-120"/>
               </a:rPr>
-              <a:t>cut</a:t>
+              <a:t>connecting element</a:t>
             </a:r>
             <a:endParaRPr lang="en-US" sz="850" dirty="0"/>
           </a:p>
@@ -21855,14 +22259,53 @@
       </p:sp>
       <p:sp>
         <p:nvSpPr>
+          <p:cNvPr id="22" name="Text 20"/>
+          <p:cNvSpPr/>
+          <p:nvPr/>
+        </p:nvSpPr>
+        <p:spPr>
+          <a:xfrm>
+            <a:off x="3659429" y="2752344"/>
+            <a:ext cx="1581912" cy="182880"/>
+          </a:xfrm>
+          <a:prstGeom prst="rect">
+            <a:avLst/>
+          </a:prstGeom>
+          <a:noFill/>
+          <a:ln/>
+        </p:spPr>
+        <p:txBody>
+          <a:bodyPr wrap="square" lIns="0" tIns="0" rIns="0" bIns="0" rtlCol="0" anchor="t"/>
+          <a:lstStyle/>
+          <a:p>
+            <a:pPr algn="ctr" indent="0" marL="0">
+              <a:buNone/>
+            </a:pPr>
+            <a:r>
+              <a:rPr lang="en-US" sz="700" i="1" dirty="0">
+                <a:solidFill>
+                  <a:srgbClr val="94A3B8"/>
+                </a:solidFill>
+                <a:latin typeface="Calibri" pitchFamily="34" charset="0"/>
+                <a:ea typeface="Calibri" pitchFamily="34" charset="-122"/>
+                <a:cs typeface="Calibri" pitchFamily="34" charset="-120"/>
+              </a:rPr>
+              <a:t>spelling joins di + sec</a:t>
+            </a:r>
+            <a:endParaRPr lang="en-US" sz="700" dirty="0"/>
+          </a:p>
+        </p:txBody>
+      </p:sp>
+      <p:sp>
+        <p:nvSpPr>
           <p:cNvPr id="23" name="Shape 21"/>
           <p:cNvSpPr/>
           <p:nvPr/>
         </p:nvSpPr>
         <p:spPr>
           <a:xfrm>
-            <a:off x="6519672" y="2258568"/>
-            <a:ext cx="1828800" cy="292608"/>
+            <a:off x="5329123" y="2258568"/>
+            <a:ext cx="1581912" cy="292608"/>
           </a:xfrm>
           <a:prstGeom prst="rect">
             <a:avLst>
@@ -21870,11 +22313,11 @@
             </a:avLst>
           </a:prstGeom>
           <a:solidFill>
-            <a:srgbClr val="FCE7F3"/>
+            <a:srgbClr val="CCFBF1"/>
           </a:solidFill>
           <a:ln w="19050">
             <a:solidFill>
-              <a:srgbClr val="DB2777"/>
+              <a:srgbClr val="0D9488"/>
             </a:solidFill>
             <a:prstDash val="solid"/>
           </a:ln>
@@ -21895,8 +22338,8 @@
         </p:nvSpPr>
         <p:spPr>
           <a:xfrm>
-            <a:off x="6519672" y="2258568"/>
-            <a:ext cx="1828800" cy="292608"/>
+            <a:off x="5329123" y="2258568"/>
+            <a:ext cx="1581912" cy="292608"/>
           </a:xfrm>
           <a:prstGeom prst="rect">
             <a:avLst/>
@@ -21914,13 +22357,13 @@
             <a:r>
               <a:rPr lang="en-US" sz="1300" b="1" dirty="0">
                 <a:solidFill>
-                  <a:srgbClr val="9D174D"/>
+                  <a:srgbClr val="0F766E"/>
                 </a:solidFill>
                 <a:latin typeface="Trebuchet MS" pitchFamily="34" charset="0"/>
                 <a:ea typeface="Trebuchet MS" pitchFamily="34" charset="-122"/>
                 <a:cs typeface="Trebuchet MS" pitchFamily="34" charset="-120"/>
               </a:rPr>
-              <a:t>t</a:t>
+              <a:t>sec</a:t>
             </a:r>
             <a:endParaRPr lang="en-US" sz="1300" dirty="0"/>
           </a:p>
@@ -21934,8 +22377,8 @@
         </p:nvSpPr>
         <p:spPr>
           <a:xfrm>
-            <a:off x="6519672" y="2569464"/>
-            <a:ext cx="1828800" cy="201168"/>
+            <a:off x="5329123" y="2569464"/>
+            <a:ext cx="1581912" cy="201168"/>
           </a:xfrm>
           <a:prstGeom prst="rect">
             <a:avLst/>
@@ -21959,6 +22402,118 @@
                 <a:ea typeface="Calibri" pitchFamily="34" charset="-122"/>
                 <a:cs typeface="Calibri" pitchFamily="34" charset="-120"/>
               </a:rPr>
+              <a:t>cut</a:t>
+            </a:r>
+            <a:endParaRPr lang="en-US" sz="850" dirty="0"/>
+          </a:p>
+        </p:txBody>
+      </p:sp>
+      <p:sp>
+        <p:nvSpPr>
+          <p:cNvPr id="26" name="Shape 24"/>
+          <p:cNvSpPr/>
+          <p:nvPr/>
+        </p:nvSpPr>
+        <p:spPr>
+          <a:xfrm>
+            <a:off x="6998818" y="2258568"/>
+            <a:ext cx="1581912" cy="292608"/>
+          </a:xfrm>
+          <a:prstGeom prst="rect">
+            <a:avLst>
+              <a:gd name="adj" fmla="val 25000"/>
+            </a:avLst>
+          </a:prstGeom>
+          <a:solidFill>
+            <a:srgbClr val="FCE7F3"/>
+          </a:solidFill>
+          <a:ln w="19050">
+            <a:solidFill>
+              <a:srgbClr val="DB2777"/>
+            </a:solidFill>
+            <a:prstDash val="solid"/>
+          </a:ln>
+          <a:effectLst>
+            <a:outerShdw sx="100000" sy="100000" kx="0" ky="0" algn="bl" rotWithShape="0" blurRad="101600" dist="38100" dir="8100000">
+              <a:srgbClr val="000000">
+                <a:alpha val="12000"/>
+              </a:srgbClr>
+            </a:outerShdw>
+          </a:effectLst>
+        </p:spPr>
+      </p:sp>
+      <p:sp>
+        <p:nvSpPr>
+          <p:cNvPr id="27" name="Text 25"/>
+          <p:cNvSpPr/>
+          <p:nvPr/>
+        </p:nvSpPr>
+        <p:spPr>
+          <a:xfrm>
+            <a:off x="6998818" y="2258568"/>
+            <a:ext cx="1581912" cy="292608"/>
+          </a:xfrm>
+          <a:prstGeom prst="rect">
+            <a:avLst/>
+          </a:prstGeom>
+          <a:noFill/>
+          <a:ln/>
+        </p:spPr>
+        <p:txBody>
+          <a:bodyPr wrap="square" lIns="0" tIns="0" rIns="0" bIns="0" rtlCol="0" anchor="ctr"/>
+          <a:lstStyle/>
+          <a:p>
+            <a:pPr algn="ctr" indent="0" marL="0">
+              <a:buNone/>
+            </a:pPr>
+            <a:r>
+              <a:rPr lang="en-US" sz="1300" b="1" dirty="0">
+                <a:solidFill>
+                  <a:srgbClr val="9D174D"/>
+                </a:solidFill>
+                <a:latin typeface="Trebuchet MS" pitchFamily="34" charset="0"/>
+                <a:ea typeface="Trebuchet MS" pitchFamily="34" charset="-122"/>
+                <a:cs typeface="Trebuchet MS" pitchFamily="34" charset="-120"/>
+              </a:rPr>
+              <a:t>t</a:t>
+            </a:r>
+            <a:endParaRPr lang="en-US" sz="1300" dirty="0"/>
+          </a:p>
+        </p:txBody>
+      </p:sp>
+      <p:sp>
+        <p:nvSpPr>
+          <p:cNvPr id="28" name="Text 26"/>
+          <p:cNvSpPr/>
+          <p:nvPr/>
+        </p:nvSpPr>
+        <p:spPr>
+          <a:xfrm>
+            <a:off x="6998818" y="2569464"/>
+            <a:ext cx="1581912" cy="201168"/>
+          </a:xfrm>
+          <a:prstGeom prst="rect">
+            <a:avLst/>
+          </a:prstGeom>
+          <a:noFill/>
+          <a:ln/>
+        </p:spPr>
+        <p:txBody>
+          <a:bodyPr wrap="square" lIns="0" tIns="0" rIns="0" bIns="0" rtlCol="0" anchor="t"/>
+          <a:lstStyle/>
+          <a:p>
+            <a:pPr algn="ctr" indent="0" marL="0">
+              <a:buNone/>
+            </a:pPr>
+            <a:r>
+              <a:rPr lang="en-US" sz="850" dirty="0">
+                <a:solidFill>
+                  <a:srgbClr val="475569"/>
+                </a:solidFill>
+                <a:latin typeface="Calibri" pitchFamily="34" charset="0"/>
+                <a:ea typeface="Calibri" pitchFamily="34" charset="-122"/>
+                <a:cs typeface="Calibri" pitchFamily="34" charset="-120"/>
+              </a:rPr>
               <a:t>verb-forming ending</a:t>
             </a:r>
             <a:endParaRPr lang="en-US" sz="850" dirty="0"/>
@@ -21967,7 +22522,7 @@
       </p:sp>
       <p:sp>
         <p:nvSpPr>
-          <p:cNvPr id="26" name="Shape 24"/>
+          <p:cNvPr id="29" name="Shape 27"/>
           <p:cNvSpPr/>
           <p:nvPr/>
         </p:nvSpPr>
@@ -21994,7 +22549,7 @@
       </p:sp>
       <p:sp>
         <p:nvSpPr>
-          <p:cNvPr id="27" name="Text 25"/>
+          <p:cNvPr id="30" name="Text 28"/>
           <p:cNvSpPr/>
           <p:nvPr/>
         </p:nvSpPr>
@@ -22033,7 +22588,7 @@
       </p:sp>
       <p:sp>
         <p:nvSpPr>
-          <p:cNvPr id="28" name="Shape 26"/>
+          <p:cNvPr id="31" name="Shape 29"/>
           <p:cNvSpPr/>
           <p:nvPr/>
         </p:nvSpPr>
@@ -22060,7 +22615,7 @@
       </p:sp>
       <p:sp>
         <p:nvSpPr>
-          <p:cNvPr id="29" name="Shape 27"/>
+          <p:cNvPr id="32" name="Shape 30"/>
           <p:cNvSpPr/>
           <p:nvPr/>
         </p:nvSpPr>
@@ -22087,7 +22642,7 @@
       </p:sp>
       <p:sp>
         <p:nvSpPr>
-          <p:cNvPr id="30" name="Text 28"/>
+          <p:cNvPr id="33" name="Text 31"/>
           <p:cNvSpPr/>
           <p:nvPr/>
         </p:nvSpPr>
@@ -22126,7 +22681,7 @@
       </p:sp>
       <p:sp>
         <p:nvSpPr>
-          <p:cNvPr id="31" name="Text 29"/>
+          <p:cNvPr id="34" name="Text 32"/>
           <p:cNvSpPr/>
           <p:nvPr/>
         </p:nvSpPr>
@@ -22165,7 +22720,7 @@
       </p:sp>
       <p:sp>
         <p:nvSpPr>
-          <p:cNvPr id="32" name="Shape 30"/>
+          <p:cNvPr id="35" name="Shape 33"/>
           <p:cNvSpPr/>
           <p:nvPr/>
         </p:nvSpPr>
@@ -22192,7 +22747,7 @@
       </p:sp>
       <p:sp>
         <p:nvSpPr>
-          <p:cNvPr id="33" name="Text 31"/>
+          <p:cNvPr id="36" name="Text 34"/>
           <p:cNvSpPr/>
           <p:nvPr/>
         </p:nvSpPr>
@@ -22231,7 +22786,7 @@
       </p:sp>
       <p:sp>
         <p:nvSpPr>
-          <p:cNvPr id="34" name="Shape 32"/>
+          <p:cNvPr id="37" name="Shape 35"/>
           <p:cNvSpPr/>
           <p:nvPr/>
         </p:nvSpPr>
@@ -22258,7 +22813,7 @@
       </p:sp>
       <p:sp>
         <p:nvSpPr>
-          <p:cNvPr id="35" name="Text 33"/>
+          <p:cNvPr id="38" name="Text 36"/>
           <p:cNvSpPr/>
           <p:nvPr/>
         </p:nvSpPr>
@@ -22297,7 +22852,7 @@
       </p:sp>
       <p:sp>
         <p:nvSpPr>
-          <p:cNvPr id="36" name="Shape 34"/>
+          <p:cNvPr id="39" name="Shape 37"/>
           <p:cNvSpPr/>
           <p:nvPr/>
         </p:nvSpPr>
@@ -22324,7 +22879,7 @@
       </p:sp>
       <p:sp>
         <p:nvSpPr>
-          <p:cNvPr id="37" name="Shape 35"/>
+          <p:cNvPr id="40" name="Shape 38"/>
           <p:cNvSpPr/>
           <p:nvPr/>
         </p:nvSpPr>
@@ -22351,7 +22906,7 @@
       </p:sp>
       <p:sp>
         <p:nvSpPr>
-          <p:cNvPr id="38" name="Text 36"/>
+          <p:cNvPr id="41" name="Text 39"/>
           <p:cNvSpPr/>
           <p:nvPr/>
         </p:nvSpPr>
@@ -22390,7 +22945,7 @@
       </p:sp>
       <p:sp>
         <p:nvSpPr>
-          <p:cNvPr id="39" name="Shape 37"/>
+          <p:cNvPr id="42" name="Shape 40"/>
           <p:cNvSpPr/>
           <p:nvPr/>
         </p:nvSpPr>
@@ -22417,7 +22972,7 @@
       </p:sp>
       <p:sp>
         <p:nvSpPr>
-          <p:cNvPr id="40" name="Text 38"/>
+          <p:cNvPr id="43" name="Text 41"/>
           <p:cNvSpPr/>
           <p:nvPr/>
         </p:nvSpPr>
@@ -22456,7 +23011,7 @@
       </p:sp>
       <p:sp>
         <p:nvSpPr>
-          <p:cNvPr id="41" name="Shape 39"/>
+          <p:cNvPr id="44" name="Shape 42"/>
           <p:cNvSpPr/>
           <p:nvPr/>
         </p:nvSpPr>
@@ -22483,7 +23038,7 @@
       </p:sp>
       <p:sp>
         <p:nvSpPr>
-          <p:cNvPr id="42" name="Text 40"/>
+          <p:cNvPr id="45" name="Text 43"/>
           <p:cNvSpPr/>
           <p:nvPr/>
         </p:nvSpPr>
@@ -22522,7 +23077,7 @@
       </p:sp>
       <p:sp>
         <p:nvSpPr>
-          <p:cNvPr id="43" name="Shape 41"/>
+          <p:cNvPr id="46" name="Shape 44"/>
           <p:cNvSpPr/>
           <p:nvPr/>
         </p:nvSpPr>
@@ -22549,7 +23104,7 @@
       </p:sp>
       <p:sp>
         <p:nvSpPr>
-          <p:cNvPr id="44" name="Text 42"/>
+          <p:cNvPr id="47" name="Text 45"/>
           <p:cNvSpPr/>
           <p:nvPr/>
         </p:nvSpPr>
@@ -22588,7 +23143,7 @@
       </p:sp>
       <p:sp>
         <p:nvSpPr>
-          <p:cNvPr id="45" name="Shape 43"/>
+          <p:cNvPr id="48" name="Shape 46"/>
           <p:cNvSpPr/>
           <p:nvPr/>
         </p:nvSpPr>
@@ -22615,7 +23170,7 @@
       </p:sp>
       <p:sp>
         <p:nvSpPr>
-          <p:cNvPr id="46" name="Text 44"/>
+          <p:cNvPr id="49" name="Text 47"/>
           <p:cNvSpPr/>
           <p:nvPr/>
         </p:nvSpPr>
@@ -22654,7 +23209,7 @@
       </p:sp>
       <p:sp>
         <p:nvSpPr>
-          <p:cNvPr id="47" name="Shape 45"/>
+          <p:cNvPr id="50" name="Shape 48"/>
           <p:cNvSpPr/>
           <p:nvPr/>
         </p:nvSpPr>
@@ -22681,7 +23236,7 @@
       </p:sp>
       <p:sp>
         <p:nvSpPr>
-          <p:cNvPr id="48" name="Text 46"/>
+          <p:cNvPr id="51" name="Text 49"/>
           <p:cNvSpPr/>
           <p:nvPr/>
         </p:nvSpPr>
@@ -23004,7 +23559,7 @@
                 <a:ea typeface="Calibri" pitchFamily="34" charset="-122"/>
                 <a:cs typeface="Calibri" pitchFamily="34" charset="-120"/>
               </a:rPr>
-              <a:t>Word Labs  •  wordlabs.app  •  Root: 'sec' = cut, divide, separate</a:t>
+              <a:t>Word Labs  •  wordlabs.app  •  Root: 'sec' = cut, divide, or separate</a:t>
             </a:r>
             <a:endParaRPr lang="en-US" sz="800" dirty="0"/>
           </a:p>
@@ -23143,7 +23698,7 @@
                 <a:ea typeface="Trebuchet MS" pitchFamily="34" charset="-122"/>
                 <a:cs typeface="Trebuchet MS" pitchFamily="34" charset="-120"/>
               </a:rPr>
-              <a:t>section</a:t>
+              <a:t>sector</a:t>
             </a:r>
             <a:endParaRPr lang="en-US" sz="2800" dirty="0"/>
           </a:p>
@@ -23831,7 +24386,7 @@
                 <a:ea typeface="Calibri" pitchFamily="34" charset="-122"/>
                 <a:cs typeface="Calibri" pitchFamily="34" charset="-120"/>
               </a:rPr>
-              <a:t>Word Labs  •  wordlabs.app  •  Root: 'sec' = cut, divide, separate</a:t>
+              <a:t>Word Labs  •  wordlabs.app  •  Root: 'sec' = cut, divide, or separate</a:t>
             </a:r>
             <a:endParaRPr lang="en-US" sz="800" dirty="0"/>
           </a:p>
@@ -23970,7 +24525,7 @@
                 <a:ea typeface="Trebuchet MS" pitchFamily="34" charset="-122"/>
                 <a:cs typeface="Trebuchet MS" pitchFamily="34" charset="-120"/>
               </a:rPr>
-              <a:t>section</a:t>
+              <a:t>sector</a:t>
             </a:r>
             <a:endParaRPr lang="en-US" sz="2800" dirty="0"/>
           </a:p>
@@ -24221,7 +24776,7 @@
                 <a:ea typeface="Trebuchet MS" pitchFamily="34" charset="-122"/>
                 <a:cs typeface="Trebuchet MS" pitchFamily="34" charset="-120"/>
               </a:rPr>
-              <a:t>tion</a:t>
+              <a:t>tor</a:t>
             </a:r>
             <a:endParaRPr lang="en-US" sz="1300" dirty="0"/>
           </a:p>
@@ -24260,7 +24815,7 @@
                 <a:ea typeface="Calibri" pitchFamily="34" charset="-122"/>
                 <a:cs typeface="Calibri" pitchFamily="34" charset="-120"/>
               </a:rPr>
-              <a:t>act or result of</a:t>
+              <a:t>one who does; agent</a:t>
             </a:r>
             <a:endParaRPr lang="en-US" sz="850" dirty="0"/>
           </a:p>
@@ -24268,57 +24823,150 @@
       </p:sp>
       <p:sp>
         <p:nvSpPr>
-          <p:cNvPr id="22" name="Text 20"/>
-          <p:cNvSpPr/>
-          <p:nvPr/>
-        </p:nvSpPr>
-        <p:spPr>
-          <a:xfrm>
-            <a:off x="5803392" y="2752344"/>
-            <a:ext cx="1828800" cy="182880"/>
-          </a:xfrm>
-          <a:prstGeom prst="rect">
-            <a:avLst/>
-          </a:prstGeom>
-          <a:noFill/>
-          <a:ln/>
-        </p:spPr>
-        <p:txBody>
-          <a:bodyPr wrap="square" lIns="0" tIns="0" rIns="0" bIns="0" rtlCol="0" anchor="t"/>
-          <a:lstStyle/>
-          <a:p>
-            <a:pPr algn="ctr" indent="0" marL="0">
-              <a:buNone/>
-            </a:pPr>
-            <a:r>
-              <a:rPr lang="en-US" sz="700" i="1" dirty="0">
-                <a:solidFill>
-                  <a:srgbClr val="94A3B8"/>
+          <p:cNvPr id="22" name="Shape 20"/>
+          <p:cNvSpPr/>
+          <p:nvPr/>
+        </p:nvSpPr>
+        <p:spPr>
+          <a:xfrm>
+            <a:off x="365760" y="3273552"/>
+            <a:ext cx="1371600" cy="658368"/>
+          </a:xfrm>
+          <a:prstGeom prst="rect">
+            <a:avLst>
+              <a:gd name="adj" fmla="val 8333"/>
+            </a:avLst>
+          </a:prstGeom>
+          <a:solidFill>
+            <a:srgbClr val="E2E8F0"/>
+          </a:solidFill>
+          <a:ln w="12700">
+            <a:solidFill>
+              <a:srgbClr val="E2E8F0"/>
+            </a:solidFill>
+            <a:prstDash val="solid"/>
+          </a:ln>
+        </p:spPr>
+      </p:sp>
+      <p:sp>
+        <p:nvSpPr>
+          <p:cNvPr id="23" name="Text 21"/>
+          <p:cNvSpPr/>
+          <p:nvPr/>
+        </p:nvSpPr>
+        <p:spPr>
+          <a:xfrm>
+            <a:off x="365760" y="3273552"/>
+            <a:ext cx="1371600" cy="658368"/>
+          </a:xfrm>
+          <a:prstGeom prst="rect">
+            <a:avLst/>
+          </a:prstGeom>
+          <a:noFill/>
+          <a:ln/>
+        </p:spPr>
+        <p:txBody>
+          <a:bodyPr wrap="square" lIns="0" tIns="0" rIns="0" bIns="0" rtlCol="0" anchor="ctr"/>
+          <a:lstStyle/>
+          <a:p>
+            <a:pPr algn="ctr" indent="0" marL="0">
+              <a:buNone/>
+            </a:pPr>
+            <a:r>
+              <a:rPr lang="en-US" sz="1100" b="1" dirty="0">
+                <a:solidFill>
+                  <a:srgbClr val="475569"/>
+                </a:solidFill>
+                <a:latin typeface="Trebuchet MS" pitchFamily="34" charset="0"/>
+                <a:ea typeface="Trebuchet MS" pitchFamily="34" charset="-122"/>
+                <a:cs typeface="Trebuchet MS" pitchFamily="34" charset="-120"/>
+              </a:rPr>
+              <a:t>Syllables</a:t>
+            </a:r>
+            <a:endParaRPr lang="en-US" sz="1100" dirty="0"/>
+          </a:p>
+        </p:txBody>
+      </p:sp>
+      <p:sp>
+        <p:nvSpPr>
+          <p:cNvPr id="24" name="Shape 22"/>
+          <p:cNvSpPr/>
+          <p:nvPr/>
+        </p:nvSpPr>
+        <p:spPr>
+          <a:xfrm>
+            <a:off x="1874520" y="3273552"/>
+            <a:ext cx="6903720" cy="658368"/>
+          </a:xfrm>
+          <a:prstGeom prst="rect">
+            <a:avLst>
+              <a:gd name="adj" fmla="val 8333"/>
+            </a:avLst>
+          </a:prstGeom>
+          <a:solidFill>
+            <a:srgbClr val="F8FAFC"/>
+          </a:solidFill>
+          <a:ln w="12700">
+            <a:solidFill>
+              <a:srgbClr val="E2E8F0"/>
+            </a:solidFill>
+            <a:prstDash val="dash"/>
+          </a:ln>
+        </p:spPr>
+      </p:sp>
+      <p:sp>
+        <p:nvSpPr>
+          <p:cNvPr id="25" name="Text 23"/>
+          <p:cNvSpPr/>
+          <p:nvPr/>
+        </p:nvSpPr>
+        <p:spPr>
+          <a:xfrm>
+            <a:off x="1874520" y="3273552"/>
+            <a:ext cx="6903720" cy="658368"/>
+          </a:xfrm>
+          <a:prstGeom prst="rect">
+            <a:avLst/>
+          </a:prstGeom>
+          <a:noFill/>
+          <a:ln/>
+        </p:spPr>
+        <p:txBody>
+          <a:bodyPr wrap="square" rtlCol="0" anchor="ctr"/>
+          <a:lstStyle/>
+          <a:p>
+            <a:pPr algn="ctr" indent="0" marL="0">
+              <a:buNone/>
+            </a:pPr>
+            <a:r>
+              <a:rPr lang="en-US" sz="1100" i="1" dirty="0">
+                <a:solidFill>
+                  <a:srgbClr val="CBD5E1"/>
                 </a:solidFill>
                 <a:latin typeface="Calibri" pitchFamily="34" charset="0"/>
                 <a:ea typeface="Calibri" pitchFamily="34" charset="-122"/>
                 <a:cs typeface="Calibri" pitchFamily="34" charset="-120"/>
               </a:rPr>
-              <a:t>ti makes /sh/ sound</a:t>
-            </a:r>
-            <a:endParaRPr lang="en-US" sz="700" dirty="0"/>
-          </a:p>
-        </p:txBody>
-      </p:sp>
-      <p:sp>
-        <p:nvSpPr>
-          <p:cNvPr id="23" name="Shape 21"/>
-          <p:cNvSpPr/>
-          <p:nvPr/>
-        </p:nvSpPr>
-        <p:spPr>
-          <a:xfrm>
-            <a:off x="365760" y="3273552"/>
-            <a:ext cx="1371600" cy="658368"/>
+              <a:t>Write here...</a:t>
+            </a:r>
+            <a:endParaRPr lang="en-US" sz="1100" dirty="0"/>
+          </a:p>
+        </p:txBody>
+      </p:sp>
+      <p:sp>
+        <p:nvSpPr>
+          <p:cNvPr id="26" name="Shape 24"/>
+          <p:cNvSpPr/>
+          <p:nvPr/>
+        </p:nvSpPr>
+        <p:spPr>
+          <a:xfrm>
+            <a:off x="365760" y="4096512"/>
+            <a:ext cx="1371600" cy="804672"/>
           </a:xfrm>
           <a:prstGeom prst="rect">
             <a:avLst>
-              <a:gd name="adj" fmla="val 8333"/>
+              <a:gd name="adj" fmla="val 6818"/>
             </a:avLst>
           </a:prstGeom>
           <a:solidFill>
@@ -24334,14 +24982,14 @@
       </p:sp>
       <p:sp>
         <p:nvSpPr>
-          <p:cNvPr id="24" name="Text 22"/>
-          <p:cNvSpPr/>
-          <p:nvPr/>
-        </p:nvSpPr>
-        <p:spPr>
-          <a:xfrm>
-            <a:off x="365760" y="3273552"/>
-            <a:ext cx="1371600" cy="658368"/>
+          <p:cNvPr id="27" name="Text 25"/>
+          <p:cNvSpPr/>
+          <p:nvPr/>
+        </p:nvSpPr>
+        <p:spPr>
+          <a:xfrm>
+            <a:off x="365760" y="4096512"/>
+            <a:ext cx="1371600" cy="804672"/>
           </a:xfrm>
           <a:prstGeom prst="rect">
             <a:avLst/>
@@ -24365,7 +25013,7 @@
                 <a:ea typeface="Trebuchet MS" pitchFamily="34" charset="-122"/>
                 <a:cs typeface="Trebuchet MS" pitchFamily="34" charset="-120"/>
               </a:rPr>
-              <a:t>Syllables</a:t>
+              <a:t>Phonemes</a:t>
             </a:r>
             <a:endParaRPr lang="en-US" sz="1100" dirty="0"/>
           </a:p>
@@ -24373,80 +25021,14 @@
       </p:sp>
       <p:sp>
         <p:nvSpPr>
-          <p:cNvPr id="25" name="Shape 23"/>
-          <p:cNvSpPr/>
-          <p:nvPr/>
-        </p:nvSpPr>
-        <p:spPr>
-          <a:xfrm>
-            <a:off x="1874520" y="3273552"/>
-            <a:ext cx="6903720" cy="658368"/>
-          </a:xfrm>
-          <a:prstGeom prst="rect">
-            <a:avLst>
-              <a:gd name="adj" fmla="val 8333"/>
-            </a:avLst>
-          </a:prstGeom>
-          <a:solidFill>
-            <a:srgbClr val="F8FAFC"/>
-          </a:solidFill>
-          <a:ln w="12700">
-            <a:solidFill>
-              <a:srgbClr val="E2E8F0"/>
-            </a:solidFill>
-            <a:prstDash val="dash"/>
-          </a:ln>
-        </p:spPr>
-      </p:sp>
-      <p:sp>
-        <p:nvSpPr>
-          <p:cNvPr id="26" name="Text 24"/>
-          <p:cNvSpPr/>
-          <p:nvPr/>
-        </p:nvSpPr>
-        <p:spPr>
-          <a:xfrm>
-            <a:off x="1874520" y="3273552"/>
-            <a:ext cx="6903720" cy="658368"/>
-          </a:xfrm>
-          <a:prstGeom prst="rect">
-            <a:avLst/>
-          </a:prstGeom>
-          <a:noFill/>
-          <a:ln/>
-        </p:spPr>
-        <p:txBody>
-          <a:bodyPr wrap="square" rtlCol="0" anchor="ctr"/>
-          <a:lstStyle/>
-          <a:p>
-            <a:pPr algn="ctr" indent="0" marL="0">
-              <a:buNone/>
-            </a:pPr>
-            <a:r>
-              <a:rPr lang="en-US" sz="1100" i="1" dirty="0">
-                <a:solidFill>
-                  <a:srgbClr val="CBD5E1"/>
-                </a:solidFill>
-                <a:latin typeface="Calibri" pitchFamily="34" charset="0"/>
-                <a:ea typeface="Calibri" pitchFamily="34" charset="-122"/>
-                <a:cs typeface="Calibri" pitchFamily="34" charset="-120"/>
-              </a:rPr>
-              <a:t>Write here...</a:t>
-            </a:r>
-            <a:endParaRPr lang="en-US" sz="1100" dirty="0"/>
-          </a:p>
-        </p:txBody>
-      </p:sp>
-      <p:sp>
-        <p:nvSpPr>
-          <p:cNvPr id="27" name="Shape 25"/>
-          <p:cNvSpPr/>
-          <p:nvPr/>
-        </p:nvSpPr>
-        <p:spPr>
-          <a:xfrm>
-            <a:off x="365760" y="4096512"/>
-            <a:ext cx="1371600" cy="804672"/>
+          <p:cNvPr id="28" name="Shape 26"/>
+          <p:cNvSpPr/>
+          <p:nvPr/>
+        </p:nvSpPr>
+        <p:spPr>
+          <a:xfrm>
+            <a:off x="1874520" y="4096512"/>
+            <a:ext cx="6903720" cy="804672"/>
           </a:xfrm>
           <a:prstGeom prst="rect">
             <a:avLst>
@@ -24454,85 +25036,19 @@
             </a:avLst>
           </a:prstGeom>
           <a:solidFill>
-            <a:srgbClr val="E2E8F0"/>
+            <a:srgbClr val="F8FAFC"/>
           </a:solidFill>
           <a:ln w="12700">
             <a:solidFill>
               <a:srgbClr val="E2E8F0"/>
             </a:solidFill>
-            <a:prstDash val="solid"/>
-          </a:ln>
-        </p:spPr>
-      </p:sp>
-      <p:sp>
-        <p:nvSpPr>
-          <p:cNvPr id="28" name="Text 26"/>
-          <p:cNvSpPr/>
-          <p:nvPr/>
-        </p:nvSpPr>
-        <p:spPr>
-          <a:xfrm>
-            <a:off x="365760" y="4096512"/>
-            <a:ext cx="1371600" cy="804672"/>
-          </a:xfrm>
-          <a:prstGeom prst="rect">
-            <a:avLst/>
-          </a:prstGeom>
-          <a:noFill/>
-          <a:ln/>
-        </p:spPr>
-        <p:txBody>
-          <a:bodyPr wrap="square" lIns="0" tIns="0" rIns="0" bIns="0" rtlCol="0" anchor="ctr"/>
-          <a:lstStyle/>
-          <a:p>
-            <a:pPr algn="ctr" indent="0" marL="0">
-              <a:buNone/>
-            </a:pPr>
-            <a:r>
-              <a:rPr lang="en-US" sz="1100" b="1" dirty="0">
-                <a:solidFill>
-                  <a:srgbClr val="475569"/>
-                </a:solidFill>
-                <a:latin typeface="Trebuchet MS" pitchFamily="34" charset="0"/>
-                <a:ea typeface="Trebuchet MS" pitchFamily="34" charset="-122"/>
-                <a:cs typeface="Trebuchet MS" pitchFamily="34" charset="-120"/>
-              </a:rPr>
-              <a:t>Phonemes</a:t>
-            </a:r>
-            <a:endParaRPr lang="en-US" sz="1100" dirty="0"/>
-          </a:p>
-        </p:txBody>
-      </p:sp>
-      <p:sp>
-        <p:nvSpPr>
-          <p:cNvPr id="29" name="Shape 27"/>
-          <p:cNvSpPr/>
-          <p:nvPr/>
-        </p:nvSpPr>
-        <p:spPr>
-          <a:xfrm>
-            <a:off x="1874520" y="4096512"/>
-            <a:ext cx="6903720" cy="804672"/>
-          </a:xfrm>
-          <a:prstGeom prst="rect">
-            <a:avLst>
-              <a:gd name="adj" fmla="val 6818"/>
-            </a:avLst>
-          </a:prstGeom>
-          <a:solidFill>
-            <a:srgbClr val="F8FAFC"/>
-          </a:solidFill>
-          <a:ln w="12700">
-            <a:solidFill>
-              <a:srgbClr val="E2E8F0"/>
-            </a:solidFill>
             <a:prstDash val="dash"/>
           </a:ln>
         </p:spPr>
       </p:sp>
       <p:sp>
         <p:nvSpPr>
-          <p:cNvPr id="30" name="Text 28"/>
+          <p:cNvPr id="29" name="Text 27"/>
           <p:cNvSpPr/>
           <p:nvPr/>
         </p:nvSpPr>
@@ -24855,7 +25371,7 @@
                 <a:ea typeface="Calibri" pitchFamily="34" charset="-122"/>
                 <a:cs typeface="Calibri" pitchFamily="34" charset="-120"/>
               </a:rPr>
-              <a:t>Word Labs  •  wordlabs.app  •  Root: 'sec' = cut, divide, separate</a:t>
+              <a:t>Word Labs  •  wordlabs.app  •  Root: 'sec' = cut, divide, or separate</a:t>
             </a:r>
             <a:endParaRPr lang="en-US" sz="800" dirty="0"/>
           </a:p>
@@ -24928,7 +25444,7 @@
                 <a:ea typeface="Trebuchet MS" pitchFamily="34" charset="-122"/>
                 <a:cs typeface="Trebuchet MS" pitchFamily="34" charset="-120"/>
               </a:rPr>
-              <a:t>We are learning that the root 'sec' means 'cut, divide, separate'.</a:t>
+              <a:t>We are learning that the root 'sec' means 'cut, divide, or separate'.</a:t>
             </a:r>
             <a:endParaRPr lang="en-US" sz="2000" dirty="0"/>
           </a:p>
@@ -25574,7 +26090,7 @@
                 <a:ea typeface="Calibri" pitchFamily="34" charset="-122"/>
                 <a:cs typeface="Calibri" pitchFamily="34" charset="-120"/>
               </a:rPr>
-              <a:t>Word Labs  •  wordlabs.app  •  Root: 'sec' = cut, divide, separate</a:t>
+              <a:t>Word Labs  •  wordlabs.app  •  Root: 'sec' = cut, divide, or separate</a:t>
             </a:r>
             <a:endParaRPr lang="en-US" sz="800" dirty="0"/>
           </a:p>
@@ -25713,7 +26229,7 @@
                 <a:ea typeface="Trebuchet MS" pitchFamily="34" charset="-122"/>
                 <a:cs typeface="Trebuchet MS" pitchFamily="34" charset="-120"/>
               </a:rPr>
-              <a:t>section</a:t>
+              <a:t>sector</a:t>
             </a:r>
             <a:endParaRPr lang="en-US" sz="2800" dirty="0"/>
           </a:p>
@@ -25964,7 +26480,7 @@
                 <a:ea typeface="Trebuchet MS" pitchFamily="34" charset="-122"/>
                 <a:cs typeface="Trebuchet MS" pitchFamily="34" charset="-120"/>
               </a:rPr>
-              <a:t>tion</a:t>
+              <a:t>tor</a:t>
             </a:r>
             <a:endParaRPr lang="en-US" sz="1300" dirty="0"/>
           </a:p>
@@ -26003,7 +26519,7 @@
                 <a:ea typeface="Calibri" pitchFamily="34" charset="-122"/>
                 <a:cs typeface="Calibri" pitchFamily="34" charset="-120"/>
               </a:rPr>
-              <a:t>act or result of</a:t>
+              <a:t>one who does; agent</a:t>
             </a:r>
             <a:endParaRPr lang="en-US" sz="850" dirty="0"/>
           </a:p>
@@ -26011,46 +26527,7 @@
       </p:sp>
       <p:sp>
         <p:nvSpPr>
-          <p:cNvPr id="22" name="Text 20"/>
-          <p:cNvSpPr/>
-          <p:nvPr/>
-        </p:nvSpPr>
-        <p:spPr>
-          <a:xfrm>
-            <a:off x="5803392" y="2752344"/>
-            <a:ext cx="1828800" cy="182880"/>
-          </a:xfrm>
-          <a:prstGeom prst="rect">
-            <a:avLst/>
-          </a:prstGeom>
-          <a:noFill/>
-          <a:ln/>
-        </p:spPr>
-        <p:txBody>
-          <a:bodyPr wrap="square" lIns="0" tIns="0" rIns="0" bIns="0" rtlCol="0" anchor="t"/>
-          <a:lstStyle/>
-          <a:p>
-            <a:pPr algn="ctr" indent="0" marL="0">
-              <a:buNone/>
-            </a:pPr>
-            <a:r>
-              <a:rPr lang="en-US" sz="700" i="1" dirty="0">
-                <a:solidFill>
-                  <a:srgbClr val="94A3B8"/>
-                </a:solidFill>
-                <a:latin typeface="Calibri" pitchFamily="34" charset="0"/>
-                <a:ea typeface="Calibri" pitchFamily="34" charset="-122"/>
-                <a:cs typeface="Calibri" pitchFamily="34" charset="-120"/>
-              </a:rPr>
-              <a:t>ti makes /sh/ sound</a:t>
-            </a:r>
-            <a:endParaRPr lang="en-US" sz="700" dirty="0"/>
-          </a:p>
-        </p:txBody>
-      </p:sp>
-      <p:sp>
-        <p:nvSpPr>
-          <p:cNvPr id="23" name="Shape 21"/>
+          <p:cNvPr id="22" name="Shape 20"/>
           <p:cNvSpPr/>
           <p:nvPr/>
         </p:nvSpPr>
@@ -26077,7 +26554,7 @@
       </p:sp>
       <p:sp>
         <p:nvSpPr>
-          <p:cNvPr id="24" name="Text 22"/>
+          <p:cNvPr id="23" name="Text 21"/>
           <p:cNvSpPr/>
           <p:nvPr/>
         </p:nvSpPr>
@@ -26116,7 +26593,7 @@
       </p:sp>
       <p:sp>
         <p:nvSpPr>
-          <p:cNvPr id="25" name="Shape 23"/>
+          <p:cNvPr id="24" name="Shape 22"/>
           <p:cNvSpPr/>
           <p:nvPr/>
         </p:nvSpPr>
@@ -26143,7 +26620,7 @@
       </p:sp>
       <p:sp>
         <p:nvSpPr>
-          <p:cNvPr id="26" name="Shape 24"/>
+          <p:cNvPr id="25" name="Shape 23"/>
           <p:cNvSpPr/>
           <p:nvPr/>
         </p:nvSpPr>
@@ -26170,7 +26647,7 @@
       </p:sp>
       <p:sp>
         <p:nvSpPr>
-          <p:cNvPr id="27" name="Text 25"/>
+          <p:cNvPr id="26" name="Text 24"/>
           <p:cNvSpPr/>
           <p:nvPr/>
         </p:nvSpPr>
@@ -26209,7 +26686,7 @@
       </p:sp>
       <p:sp>
         <p:nvSpPr>
-          <p:cNvPr id="28" name="Text 26"/>
+          <p:cNvPr id="27" name="Text 25"/>
           <p:cNvSpPr/>
           <p:nvPr/>
         </p:nvSpPr>
@@ -26248,7 +26725,7 @@
       </p:sp>
       <p:sp>
         <p:nvSpPr>
-          <p:cNvPr id="29" name="Shape 27"/>
+          <p:cNvPr id="28" name="Shape 26"/>
           <p:cNvSpPr/>
           <p:nvPr/>
         </p:nvSpPr>
@@ -26275,7 +26752,7 @@
       </p:sp>
       <p:sp>
         <p:nvSpPr>
-          <p:cNvPr id="30" name="Text 28"/>
+          <p:cNvPr id="29" name="Text 27"/>
           <p:cNvSpPr/>
           <p:nvPr/>
         </p:nvSpPr>
@@ -26306,7 +26783,7 @@
                 <a:ea typeface="Trebuchet MS" pitchFamily="34" charset="-122"/>
                 <a:cs typeface="Trebuchet MS" pitchFamily="34" charset="-120"/>
               </a:rPr>
-              <a:t>tion</a:t>
+              <a:t>tor</a:t>
             </a:r>
             <a:endParaRPr lang="en-US" sz="1400" dirty="0"/>
           </a:p>
@@ -26314,7 +26791,7 @@
       </p:sp>
       <p:sp>
         <p:nvSpPr>
-          <p:cNvPr id="31" name="Shape 29"/>
+          <p:cNvPr id="30" name="Shape 28"/>
           <p:cNvSpPr/>
           <p:nvPr/>
         </p:nvSpPr>
@@ -26341,7 +26818,7 @@
       </p:sp>
       <p:sp>
         <p:nvSpPr>
-          <p:cNvPr id="32" name="Text 30"/>
+          <p:cNvPr id="31" name="Text 29"/>
           <p:cNvSpPr/>
           <p:nvPr/>
         </p:nvSpPr>
@@ -26380,7 +26857,7 @@
       </p:sp>
       <p:sp>
         <p:nvSpPr>
-          <p:cNvPr id="33" name="Shape 31"/>
+          <p:cNvPr id="32" name="Shape 30"/>
           <p:cNvSpPr/>
           <p:nvPr/>
         </p:nvSpPr>
@@ -26407,7 +26884,7 @@
       </p:sp>
       <p:sp>
         <p:nvSpPr>
-          <p:cNvPr id="34" name="Text 32"/>
+          <p:cNvPr id="33" name="Text 31"/>
           <p:cNvSpPr/>
           <p:nvPr/>
         </p:nvSpPr>
@@ -26730,7 +27207,7 @@
                 <a:ea typeface="Calibri" pitchFamily="34" charset="-122"/>
                 <a:cs typeface="Calibri" pitchFamily="34" charset="-120"/>
               </a:rPr>
-              <a:t>Word Labs  •  wordlabs.app  •  Root: 'sec' = cut, divide, separate</a:t>
+              <a:t>Word Labs  •  wordlabs.app  •  Root: 'sec' = cut, divide, or separate</a:t>
             </a:r>
             <a:endParaRPr lang="en-US" sz="800" dirty="0"/>
           </a:p>
@@ -26869,7 +27346,7 @@
                 <a:ea typeface="Trebuchet MS" pitchFamily="34" charset="-122"/>
                 <a:cs typeface="Trebuchet MS" pitchFamily="34" charset="-120"/>
               </a:rPr>
-              <a:t>section</a:t>
+              <a:t>sector</a:t>
             </a:r>
             <a:endParaRPr lang="en-US" sz="2800" dirty="0"/>
           </a:p>
@@ -27120,7 +27597,7 @@
                 <a:ea typeface="Trebuchet MS" pitchFamily="34" charset="-122"/>
                 <a:cs typeface="Trebuchet MS" pitchFamily="34" charset="-120"/>
               </a:rPr>
-              <a:t>tion</a:t>
+              <a:t>tor</a:t>
             </a:r>
             <a:endParaRPr lang="en-US" sz="1300" dirty="0"/>
           </a:p>
@@ -27159,7 +27636,7 @@
                 <a:ea typeface="Calibri" pitchFamily="34" charset="-122"/>
                 <a:cs typeface="Calibri" pitchFamily="34" charset="-120"/>
               </a:rPr>
-              <a:t>act or result of</a:t>
+              <a:t>one who does; agent</a:t>
             </a:r>
             <a:endParaRPr lang="en-US" sz="850" dirty="0"/>
           </a:p>
@@ -27167,46 +27644,7 @@
       </p:sp>
       <p:sp>
         <p:nvSpPr>
-          <p:cNvPr id="22" name="Text 20"/>
-          <p:cNvSpPr/>
-          <p:nvPr/>
-        </p:nvSpPr>
-        <p:spPr>
-          <a:xfrm>
-            <a:off x="5803392" y="2752344"/>
-            <a:ext cx="1828800" cy="182880"/>
-          </a:xfrm>
-          <a:prstGeom prst="rect">
-            <a:avLst/>
-          </a:prstGeom>
-          <a:noFill/>
-          <a:ln/>
-        </p:spPr>
-        <p:txBody>
-          <a:bodyPr wrap="square" lIns="0" tIns="0" rIns="0" bIns="0" rtlCol="0" anchor="t"/>
-          <a:lstStyle/>
-          <a:p>
-            <a:pPr algn="ctr" indent="0" marL="0">
-              <a:buNone/>
-            </a:pPr>
-            <a:r>
-              <a:rPr lang="en-US" sz="700" i="1" dirty="0">
-                <a:solidFill>
-                  <a:srgbClr val="94A3B8"/>
-                </a:solidFill>
-                <a:latin typeface="Calibri" pitchFamily="34" charset="0"/>
-                <a:ea typeface="Calibri" pitchFamily="34" charset="-122"/>
-                <a:cs typeface="Calibri" pitchFamily="34" charset="-120"/>
-              </a:rPr>
-              <a:t>ti makes /sh/ sound</a:t>
-            </a:r>
-            <a:endParaRPr lang="en-US" sz="700" dirty="0"/>
-          </a:p>
-        </p:txBody>
-      </p:sp>
-      <p:sp>
-        <p:nvSpPr>
-          <p:cNvPr id="23" name="Shape 21"/>
+          <p:cNvPr id="22" name="Shape 20"/>
           <p:cNvSpPr/>
           <p:nvPr/>
         </p:nvSpPr>
@@ -27233,7 +27671,7 @@
       </p:sp>
       <p:sp>
         <p:nvSpPr>
-          <p:cNvPr id="24" name="Text 22"/>
+          <p:cNvPr id="23" name="Text 21"/>
           <p:cNvSpPr/>
           <p:nvPr/>
         </p:nvSpPr>
@@ -27272,7 +27710,7 @@
       </p:sp>
       <p:sp>
         <p:nvSpPr>
-          <p:cNvPr id="25" name="Shape 23"/>
+          <p:cNvPr id="24" name="Shape 22"/>
           <p:cNvSpPr/>
           <p:nvPr/>
         </p:nvSpPr>
@@ -27299,7 +27737,7 @@
       </p:sp>
       <p:sp>
         <p:nvSpPr>
-          <p:cNvPr id="26" name="Shape 24"/>
+          <p:cNvPr id="25" name="Shape 23"/>
           <p:cNvSpPr/>
           <p:nvPr/>
         </p:nvSpPr>
@@ -27326,7 +27764,7 @@
       </p:sp>
       <p:sp>
         <p:nvSpPr>
-          <p:cNvPr id="27" name="Text 25"/>
+          <p:cNvPr id="26" name="Text 24"/>
           <p:cNvSpPr/>
           <p:nvPr/>
         </p:nvSpPr>
@@ -27365,7 +27803,7 @@
       </p:sp>
       <p:sp>
         <p:nvSpPr>
-          <p:cNvPr id="28" name="Text 26"/>
+          <p:cNvPr id="27" name="Text 25"/>
           <p:cNvSpPr/>
           <p:nvPr/>
         </p:nvSpPr>
@@ -27404,7 +27842,7 @@
       </p:sp>
       <p:sp>
         <p:nvSpPr>
-          <p:cNvPr id="29" name="Shape 27"/>
+          <p:cNvPr id="28" name="Shape 26"/>
           <p:cNvSpPr/>
           <p:nvPr/>
         </p:nvSpPr>
@@ -27431,7 +27869,7 @@
       </p:sp>
       <p:sp>
         <p:nvSpPr>
-          <p:cNvPr id="30" name="Text 28"/>
+          <p:cNvPr id="29" name="Text 27"/>
           <p:cNvSpPr/>
           <p:nvPr/>
         </p:nvSpPr>
@@ -27462,7 +27900,7 @@
                 <a:ea typeface="Trebuchet MS" pitchFamily="34" charset="-122"/>
                 <a:cs typeface="Trebuchet MS" pitchFamily="34" charset="-120"/>
               </a:rPr>
-              <a:t>tion</a:t>
+              <a:t>tor</a:t>
             </a:r>
             <a:endParaRPr lang="en-US" sz="1400" dirty="0"/>
           </a:p>
@@ -27470,7 +27908,7 @@
       </p:sp>
       <p:sp>
         <p:nvSpPr>
-          <p:cNvPr id="31" name="Shape 29"/>
+          <p:cNvPr id="30" name="Shape 28"/>
           <p:cNvSpPr/>
           <p:nvPr/>
         </p:nvSpPr>
@@ -27497,7 +27935,7 @@
       </p:sp>
       <p:sp>
         <p:nvSpPr>
-          <p:cNvPr id="32" name="Text 30"/>
+          <p:cNvPr id="31" name="Text 29"/>
           <p:cNvSpPr/>
           <p:nvPr/>
         </p:nvSpPr>
@@ -27536,22 +27974,49 @@
       </p:sp>
       <p:sp>
         <p:nvSpPr>
+          <p:cNvPr id="32" name="Shape 30"/>
+          <p:cNvSpPr/>
+          <p:nvPr/>
+        </p:nvSpPr>
+        <p:spPr>
+          <a:xfrm>
+            <a:off x="1874520" y="4096512"/>
+            <a:ext cx="6903720" cy="658368"/>
+          </a:xfrm>
+          <a:prstGeom prst="rect">
+            <a:avLst>
+              <a:gd name="adj" fmla="val 8333"/>
+            </a:avLst>
+          </a:prstGeom>
+          <a:solidFill>
+            <a:srgbClr val="FCE7F3"/>
+          </a:solidFill>
+          <a:ln w="12700">
+            <a:solidFill>
+              <a:srgbClr val="DB2777"/>
+            </a:solidFill>
+            <a:prstDash val="solid"/>
+          </a:ln>
+        </p:spPr>
+      </p:sp>
+      <p:sp>
+        <p:nvSpPr>
           <p:cNvPr id="33" name="Shape 31"/>
           <p:cNvSpPr/>
           <p:nvPr/>
         </p:nvSpPr>
         <p:spPr>
           <a:xfrm>
-            <a:off x="1874520" y="4096512"/>
-            <a:ext cx="6903720" cy="804672"/>
+            <a:off x="2427732" y="4169664"/>
+            <a:ext cx="685800" cy="475488"/>
           </a:xfrm>
           <a:prstGeom prst="rect">
             <a:avLst>
-              <a:gd name="adj" fmla="val 6818"/>
+              <a:gd name="adj" fmla="val 7692"/>
             </a:avLst>
           </a:prstGeom>
           <a:solidFill>
-            <a:srgbClr val="FCE7F3"/>
+            <a:srgbClr val="FFFFFF"/>
           </a:solidFill>
           <a:ln w="12700">
             <a:solidFill>
@@ -27563,41 +28028,14 @@
       </p:sp>
       <p:sp>
         <p:nvSpPr>
-          <p:cNvPr id="34" name="Shape 32"/>
-          <p:cNvSpPr/>
-          <p:nvPr/>
-        </p:nvSpPr>
-        <p:spPr>
-          <a:xfrm>
-            <a:off x="2254649" y="4169664"/>
-            <a:ext cx="685800" cy="384048"/>
-          </a:xfrm>
-          <a:prstGeom prst="rect">
-            <a:avLst>
-              <a:gd name="adj" fmla="val 9524"/>
-            </a:avLst>
-          </a:prstGeom>
-          <a:solidFill>
-            <a:srgbClr val="FFFFFF"/>
-          </a:solidFill>
-          <a:ln w="12700">
-            <a:solidFill>
-              <a:srgbClr val="DB2777"/>
-            </a:solidFill>
-            <a:prstDash val="solid"/>
-          </a:ln>
-        </p:spPr>
-      </p:sp>
-      <p:sp>
-        <p:nvSpPr>
-          <p:cNvPr id="35" name="Text 33"/>
-          <p:cNvSpPr/>
-          <p:nvPr/>
-        </p:nvSpPr>
-        <p:spPr>
-          <a:xfrm>
-            <a:off x="2254649" y="4169664"/>
-            <a:ext cx="685800" cy="384048"/>
+          <p:cNvPr id="34" name="Text 32"/>
+          <p:cNvSpPr/>
+          <p:nvPr/>
+        </p:nvSpPr>
+        <p:spPr>
+          <a:xfrm>
+            <a:off x="2427732" y="4169664"/>
+            <a:ext cx="685800" cy="475488"/>
           </a:xfrm>
           <a:prstGeom prst="rect">
             <a:avLst/>
@@ -27629,18 +28067,18 @@
       </p:sp>
       <p:sp>
         <p:nvSpPr>
-          <p:cNvPr id="36" name="Shape 34"/>
-          <p:cNvSpPr/>
-          <p:nvPr/>
-        </p:nvSpPr>
-        <p:spPr>
-          <a:xfrm>
-            <a:off x="3293146" y="4169664"/>
-            <a:ext cx="685800" cy="384048"/>
+          <p:cNvPr id="35" name="Shape 33"/>
+          <p:cNvSpPr/>
+          <p:nvPr/>
+        </p:nvSpPr>
+        <p:spPr>
+          <a:xfrm>
+            <a:off x="3639312" y="4169664"/>
+            <a:ext cx="685800" cy="475488"/>
           </a:xfrm>
           <a:prstGeom prst="rect">
             <a:avLst>
-              <a:gd name="adj" fmla="val 9524"/>
+              <a:gd name="adj" fmla="val 7692"/>
             </a:avLst>
           </a:prstGeom>
           <a:solidFill>
@@ -27656,14 +28094,14 @@
       </p:sp>
       <p:sp>
         <p:nvSpPr>
-          <p:cNvPr id="37" name="Text 35"/>
-          <p:cNvSpPr/>
-          <p:nvPr/>
-        </p:nvSpPr>
-        <p:spPr>
-          <a:xfrm>
-            <a:off x="3293146" y="4169664"/>
-            <a:ext cx="685800" cy="384048"/>
+          <p:cNvPr id="36" name="Text 34"/>
+          <p:cNvSpPr/>
+          <p:nvPr/>
+        </p:nvSpPr>
+        <p:spPr>
+          <a:xfrm>
+            <a:off x="3639312" y="4169664"/>
+            <a:ext cx="685800" cy="475488"/>
           </a:xfrm>
           <a:prstGeom prst="rect">
             <a:avLst/>
@@ -27695,18 +28133,18 @@
       </p:sp>
       <p:sp>
         <p:nvSpPr>
-          <p:cNvPr id="38" name="Shape 36"/>
-          <p:cNvSpPr/>
-          <p:nvPr/>
-        </p:nvSpPr>
-        <p:spPr>
-          <a:xfrm>
-            <a:off x="4331643" y="4169664"/>
-            <a:ext cx="685800" cy="384048"/>
+          <p:cNvPr id="37" name="Shape 35"/>
+          <p:cNvSpPr/>
+          <p:nvPr/>
+        </p:nvSpPr>
+        <p:spPr>
+          <a:xfrm>
+            <a:off x="4850892" y="4169664"/>
+            <a:ext cx="685800" cy="475488"/>
           </a:xfrm>
           <a:prstGeom prst="rect">
             <a:avLst>
-              <a:gd name="adj" fmla="val 9524"/>
+              <a:gd name="adj" fmla="val 7692"/>
             </a:avLst>
           </a:prstGeom>
           <a:solidFill>
@@ -27722,14 +28160,14 @@
       </p:sp>
       <p:sp>
         <p:nvSpPr>
-          <p:cNvPr id="39" name="Text 37"/>
-          <p:cNvSpPr/>
-          <p:nvPr/>
-        </p:nvSpPr>
-        <p:spPr>
-          <a:xfrm>
-            <a:off x="4331643" y="4169664"/>
-            <a:ext cx="685800" cy="384048"/>
+          <p:cNvPr id="38" name="Text 36"/>
+          <p:cNvSpPr/>
+          <p:nvPr/>
+        </p:nvSpPr>
+        <p:spPr>
+          <a:xfrm>
+            <a:off x="4850892" y="4169664"/>
+            <a:ext cx="685800" cy="475488"/>
           </a:xfrm>
           <a:prstGeom prst="rect">
             <a:avLst/>
@@ -27761,18 +28199,18 @@
       </p:sp>
       <p:sp>
         <p:nvSpPr>
-          <p:cNvPr id="40" name="Shape 38"/>
-          <p:cNvSpPr/>
-          <p:nvPr/>
-        </p:nvSpPr>
-        <p:spPr>
-          <a:xfrm>
-            <a:off x="5370141" y="4169664"/>
-            <a:ext cx="685800" cy="384048"/>
+          <p:cNvPr id="39" name="Shape 37"/>
+          <p:cNvSpPr/>
+          <p:nvPr/>
+        </p:nvSpPr>
+        <p:spPr>
+          <a:xfrm>
+            <a:off x="6062472" y="4169664"/>
+            <a:ext cx="685800" cy="475488"/>
           </a:xfrm>
           <a:prstGeom prst="rect">
             <a:avLst>
-              <a:gd name="adj" fmla="val 9524"/>
+              <a:gd name="adj" fmla="val 7692"/>
             </a:avLst>
           </a:prstGeom>
           <a:solidFill>
@@ -27788,14 +28226,14 @@
       </p:sp>
       <p:sp>
         <p:nvSpPr>
-          <p:cNvPr id="41" name="Text 39"/>
-          <p:cNvSpPr/>
-          <p:nvPr/>
-        </p:nvSpPr>
-        <p:spPr>
-          <a:xfrm>
-            <a:off x="5370141" y="4169664"/>
-            <a:ext cx="685800" cy="384048"/>
+          <p:cNvPr id="40" name="Text 38"/>
+          <p:cNvSpPr/>
+          <p:nvPr/>
+        </p:nvSpPr>
+        <p:spPr>
+          <a:xfrm>
+            <a:off x="6062472" y="4169664"/>
+            <a:ext cx="685800" cy="475488"/>
           </a:xfrm>
           <a:prstGeom prst="rect">
             <a:avLst/>
@@ -27827,80 +28265,41 @@
       </p:sp>
       <p:sp>
         <p:nvSpPr>
+          <p:cNvPr id="41" name="Shape 39"/>
+          <p:cNvSpPr/>
+          <p:nvPr/>
+        </p:nvSpPr>
+        <p:spPr>
+          <a:xfrm>
+            <a:off x="7274052" y="4169664"/>
+            <a:ext cx="685800" cy="475488"/>
+          </a:xfrm>
+          <a:prstGeom prst="rect">
+            <a:avLst>
+              <a:gd name="adj" fmla="val 7692"/>
+            </a:avLst>
+          </a:prstGeom>
+          <a:solidFill>
+            <a:srgbClr val="FFFFFF"/>
+          </a:solidFill>
+          <a:ln w="12700">
+            <a:solidFill>
+              <a:srgbClr val="DB2777"/>
+            </a:solidFill>
+            <a:prstDash val="solid"/>
+          </a:ln>
+        </p:spPr>
+      </p:sp>
+      <p:sp>
+        <p:nvSpPr>
           <p:cNvPr id="42" name="Text 40"/>
           <p:cNvSpPr/>
           <p:nvPr/>
         </p:nvSpPr>
         <p:spPr>
           <a:xfrm>
-            <a:off x="5370141" y="4572000"/>
-            <a:ext cx="685800" cy="219456"/>
-          </a:xfrm>
-          <a:prstGeom prst="rect">
-            <a:avLst/>
-          </a:prstGeom>
-          <a:noFill/>
-          <a:ln/>
-        </p:spPr>
-        <p:txBody>
-          <a:bodyPr wrap="square" lIns="0" tIns="0" rIns="0" bIns="0" rtlCol="0" anchor="t"/>
-          <a:lstStyle/>
-          <a:p>
-            <a:pPr algn="ctr" indent="0" marL="0">
-              <a:buNone/>
-            </a:pPr>
-            <a:r>
-              <a:rPr lang="en-US" sz="750" i="1" dirty="0">
-                <a:solidFill>
-                  <a:srgbClr val="94A3B8"/>
-                </a:solidFill>
-                <a:latin typeface="Calibri" pitchFamily="34" charset="0"/>
-                <a:ea typeface="Calibri" pitchFamily="34" charset="-122"/>
-                <a:cs typeface="Calibri" pitchFamily="34" charset="-120"/>
-              </a:rPr>
-              <a:t>/sh/</a:t>
-            </a:r>
-            <a:endParaRPr lang="en-US" sz="750" dirty="0"/>
-          </a:p>
-        </p:txBody>
-      </p:sp>
-      <p:sp>
-        <p:nvSpPr>
-          <p:cNvPr id="43" name="Shape 41"/>
-          <p:cNvSpPr/>
-          <p:nvPr/>
-        </p:nvSpPr>
-        <p:spPr>
-          <a:xfrm>
-            <a:off x="6408638" y="4169664"/>
-            <a:ext cx="685800" cy="384048"/>
-          </a:xfrm>
-          <a:prstGeom prst="rect">
-            <a:avLst>
-              <a:gd name="adj" fmla="val 9524"/>
-            </a:avLst>
-          </a:prstGeom>
-          <a:solidFill>
-            <a:srgbClr val="FFFFFF"/>
-          </a:solidFill>
-          <a:ln w="12700">
-            <a:solidFill>
-              <a:srgbClr val="DB2777"/>
-            </a:solidFill>
-            <a:prstDash val="solid"/>
-          </a:ln>
-        </p:spPr>
-      </p:sp>
-      <p:sp>
-        <p:nvSpPr>
-          <p:cNvPr id="44" name="Text 42"/>
-          <p:cNvSpPr/>
-          <p:nvPr/>
-        </p:nvSpPr>
-        <p:spPr>
-          <a:xfrm>
-            <a:off x="6408638" y="4169664"/>
-            <a:ext cx="685800" cy="384048"/>
+            <a:off x="7274052" y="4169664"/>
+            <a:ext cx="685800" cy="475488"/>
           </a:xfrm>
           <a:prstGeom prst="rect">
             <a:avLst/>
@@ -27924,73 +28323,7 @@
                 <a:ea typeface="Trebuchet MS" pitchFamily="34" charset="-122"/>
                 <a:cs typeface="Trebuchet MS" pitchFamily="34" charset="-120"/>
               </a:rPr>
-              <a:t>io</a:t>
-            </a:r>
-            <a:endParaRPr lang="en-US" sz="900" dirty="0"/>
-          </a:p>
-        </p:txBody>
-      </p:sp>
-      <p:sp>
-        <p:nvSpPr>
-          <p:cNvPr id="45" name="Shape 43"/>
-          <p:cNvSpPr/>
-          <p:nvPr/>
-        </p:nvSpPr>
-        <p:spPr>
-          <a:xfrm>
-            <a:off x="7447135" y="4169664"/>
-            <a:ext cx="685800" cy="384048"/>
-          </a:xfrm>
-          <a:prstGeom prst="rect">
-            <a:avLst>
-              <a:gd name="adj" fmla="val 9524"/>
-            </a:avLst>
-          </a:prstGeom>
-          <a:solidFill>
-            <a:srgbClr val="FFFFFF"/>
-          </a:solidFill>
-          <a:ln w="12700">
-            <a:solidFill>
-              <a:srgbClr val="DB2777"/>
-            </a:solidFill>
-            <a:prstDash val="solid"/>
-          </a:ln>
-        </p:spPr>
-      </p:sp>
-      <p:sp>
-        <p:nvSpPr>
-          <p:cNvPr id="46" name="Text 44"/>
-          <p:cNvSpPr/>
-          <p:nvPr/>
-        </p:nvSpPr>
-        <p:spPr>
-          <a:xfrm>
-            <a:off x="7447135" y="4169664"/>
-            <a:ext cx="685800" cy="384048"/>
-          </a:xfrm>
-          <a:prstGeom prst="rect">
-            <a:avLst/>
-          </a:prstGeom>
-          <a:noFill/>
-          <a:ln/>
-        </p:spPr>
-        <p:txBody>
-          <a:bodyPr wrap="square" lIns="0" tIns="0" rIns="0" bIns="0" rtlCol="0" anchor="ctr"/>
-          <a:lstStyle/>
-          <a:p>
-            <a:pPr algn="ctr" indent="0" marL="0">
-              <a:buNone/>
-            </a:pPr>
-            <a:r>
-              <a:rPr lang="en-US" sz="900" b="1" dirty="0">
-                <a:solidFill>
-                  <a:srgbClr val="9D174D"/>
-                </a:solidFill>
-                <a:latin typeface="Trebuchet MS" pitchFamily="34" charset="0"/>
-                <a:ea typeface="Trebuchet MS" pitchFamily="34" charset="-122"/>
-                <a:cs typeface="Trebuchet MS" pitchFamily="34" charset="-120"/>
-              </a:rPr>
-              <a:t>n</a:t>
+              <a:t>or</a:t>
             </a:r>
             <a:endParaRPr lang="en-US" sz="900" dirty="0"/>
           </a:p>
@@ -28282,7 +28615,7 @@
                 <a:ea typeface="Calibri" pitchFamily="34" charset="-122"/>
                 <a:cs typeface="Calibri" pitchFamily="34" charset="-120"/>
               </a:rPr>
-              <a:t>Word Labs  •  wordlabs.app  •  Root: 'sec' = cut, divide, separate</a:t>
+              <a:t>Word Labs  •  wordlabs.app  •  Root: 'sec' = cut, divide, or separate</a:t>
             </a:r>
             <a:endParaRPr lang="en-US" sz="800" dirty="0"/>
           </a:p>
@@ -29109,7 +29442,7 @@
                 <a:ea typeface="Calibri" pitchFamily="34" charset="-122"/>
                 <a:cs typeface="Calibri" pitchFamily="34" charset="-120"/>
               </a:rPr>
-              <a:t>Word Labs  •  wordlabs.app  •  Root: 'sec' = cut, divide, separate</a:t>
+              <a:t>Word Labs  •  wordlabs.app  •  Root: 'sec' = cut, divide, or separate</a:t>
             </a:r>
             <a:endParaRPr lang="en-US" sz="800" dirty="0"/>
           </a:p>
@@ -29426,7 +29759,7 @@
                 <a:ea typeface="Calibri" pitchFamily="34" charset="-122"/>
                 <a:cs typeface="Calibri" pitchFamily="34" charset="-120"/>
               </a:rPr>
-              <a:t>between, among</a:t>
+              <a:t>between</a:t>
             </a:r>
             <a:endParaRPr lang="en-US" sz="850" dirty="0"/>
           </a:p>
@@ -30206,7 +30539,7 @@
                 <a:ea typeface="Calibri" pitchFamily="34" charset="-122"/>
                 <a:cs typeface="Calibri" pitchFamily="34" charset="-120"/>
               </a:rPr>
-              <a:t>Word Labs  •  wordlabs.app  •  Root: 'sec' = cut, divide, separate</a:t>
+              <a:t>Word Labs  •  wordlabs.app  •  Root: 'sec' = cut, divide, or separate</a:t>
             </a:r>
             <a:endParaRPr lang="en-US" sz="800" dirty="0"/>
           </a:p>
@@ -30523,7 +30856,7 @@
                 <a:ea typeface="Calibri" pitchFamily="34" charset="-122"/>
                 <a:cs typeface="Calibri" pitchFamily="34" charset="-120"/>
               </a:rPr>
-              <a:t>between, among</a:t>
+              <a:t>between</a:t>
             </a:r>
             <a:endParaRPr lang="en-US" sz="850" dirty="0"/>
           </a:p>
@@ -31540,7 +31873,7 @@
                 <a:ea typeface="Calibri" pitchFamily="34" charset="-122"/>
                 <a:cs typeface="Calibri" pitchFamily="34" charset="-120"/>
               </a:rPr>
-              <a:t>Word Labs  •  wordlabs.app  •  Root: 'sec' = cut, divide, separate</a:t>
+              <a:t>Word Labs  •  wordlabs.app  •  Root: 'sec' = cut, divide, or separate</a:t>
             </a:r>
             <a:endParaRPr lang="en-US" sz="800" dirty="0"/>
           </a:p>
@@ -31857,7 +32190,7 @@
                 <a:ea typeface="Calibri" pitchFamily="34" charset="-122"/>
                 <a:cs typeface="Calibri" pitchFamily="34" charset="-120"/>
               </a:rPr>
-              <a:t>between, among</a:t>
+              <a:t>between</a:t>
             </a:r>
             <a:endParaRPr lang="en-US" sz="850" dirty="0"/>
           </a:p>
@@ -33363,7 +33696,7 @@
                 <a:ea typeface="Calibri" pitchFamily="34" charset="-122"/>
                 <a:cs typeface="Calibri" pitchFamily="34" charset="-120"/>
               </a:rPr>
-              <a:t>Word Labs  •  wordlabs.app  •  Root: 'sec' = cut, divide, separate</a:t>
+              <a:t>Word Labs  •  wordlabs.app  •  Root: 'sec' = cut, divide, or separate</a:t>
             </a:r>
             <a:endParaRPr lang="en-US" sz="800" dirty="0"/>
           </a:p>
@@ -34532,7 +34865,7 @@
                 <a:ea typeface="Calibri" pitchFamily="34" charset="-122"/>
                 <a:cs typeface="Calibri" pitchFamily="34" charset="-120"/>
               </a:rPr>
-              <a:t>Word Labs  •  wordlabs.app  •  Root: 'sec' = cut, divide, separate</a:t>
+              <a:t>Word Labs  •  wordlabs.app  •  Root: 'sec' = cut, divide, or separate</a:t>
             </a:r>
             <a:endParaRPr lang="en-US" sz="800" dirty="0"/>
           </a:p>
@@ -35267,7 +35600,7 @@
                 <a:ea typeface="Trebuchet MS" pitchFamily="34" charset="-122"/>
                 <a:cs typeface="Trebuchet MS" pitchFamily="34" charset="-120"/>
               </a:rPr>
-              <a:t>-tions</a:t>
+              <a:t>-tion</a:t>
             </a:r>
             <a:endParaRPr lang="en-US" sz="1300" dirty="0"/>
           </a:p>
@@ -35420,7 +35753,7 @@
                 <a:ea typeface="Trebuchet MS" pitchFamily="34" charset="-122"/>
                 <a:cs typeface="Trebuchet MS" pitchFamily="34" charset="-120"/>
               </a:rPr>
-              <a:t>-ment</a:t>
+              <a:t>-ant</a:t>
             </a:r>
             <a:endParaRPr lang="en-US" sz="1300" dirty="0"/>
           </a:p>
@@ -35573,7 +35906,7 @@
                 <a:ea typeface="Trebuchet MS" pitchFamily="34" charset="-122"/>
                 <a:cs typeface="Trebuchet MS" pitchFamily="34" charset="-120"/>
               </a:rPr>
-              <a:t>-ed</a:t>
+              <a:t>-ment</a:t>
             </a:r>
             <a:endParaRPr lang="en-US" sz="1300" dirty="0"/>
           </a:p>
@@ -35810,7 +36143,7 @@
                 <a:ea typeface="Trebuchet MS" pitchFamily="34" charset="-122"/>
                 <a:cs typeface="Trebuchet MS" pitchFamily="34" charset="-120"/>
               </a:rPr>
-              <a:t>intersect</a:t>
+              <a:t>bisect</a:t>
             </a:r>
             <a:endParaRPr lang="en-US" sz="1200" dirty="0"/>
           </a:p>
@@ -35876,7 +36209,7 @@
                 <a:ea typeface="Trebuchet MS" pitchFamily="34" charset="-122"/>
                 <a:cs typeface="Trebuchet MS" pitchFamily="34" charset="-120"/>
               </a:rPr>
-              <a:t>bisect</a:t>
+              <a:t>dissect</a:t>
             </a:r>
             <a:endParaRPr lang="en-US" sz="1200" dirty="0"/>
           </a:p>
@@ -35942,7 +36275,7 @@
                 <a:ea typeface="Trebuchet MS" pitchFamily="34" charset="-122"/>
                 <a:cs typeface="Trebuchet MS" pitchFamily="34" charset="-120"/>
               </a:rPr>
-              <a:t>dissect</a:t>
+              <a:t>intersect</a:t>
             </a:r>
             <a:endParaRPr lang="en-US" sz="1200" dirty="0"/>
           </a:p>
@@ -36432,7 +36765,7 @@
                 <a:ea typeface="Calibri" pitchFamily="34" charset="-122"/>
                 <a:cs typeface="Calibri" pitchFamily="34" charset="-120"/>
               </a:rPr>
-              <a:t>Word Labs  •  wordlabs.app  •  Root: 'sec' = cut, divide, separate</a:t>
+              <a:t>Word Labs  •  wordlabs.app  •  Root: 'sec' = cut, divide, or separate</a:t>
             </a:r>
             <a:endParaRPr lang="en-US" sz="800" dirty="0"/>
           </a:p>
@@ -36596,7 +36929,7 @@
                 <a:ea typeface="Calibri" pitchFamily="34" charset="-122"/>
                 <a:cs typeface="Calibri" pitchFamily="34" charset="-120"/>
               </a:rPr>
-              <a:t>The core part of a word carrying its basic meaning. For example, 'sec' means 'cut, divide, separate'.</a:t>
+              <a:t>The core part of a word carrying its basic meaning. For example, 'sec' means 'cut, divide, or separate'.</a:t>
             </a:r>
             <a:endParaRPr lang="en-US" sz="1350" dirty="0"/>
           </a:p>
@@ -37216,7 +37549,7 @@
                 <a:ea typeface="Calibri" pitchFamily="34" charset="-122"/>
                 <a:cs typeface="Calibri" pitchFamily="34" charset="-120"/>
               </a:rPr>
-              <a:t>Word Labs  •  wordlabs.app  •  Root: 'sec' = cut, divide, separate</a:t>
+              <a:t>Word Labs  •  wordlabs.app  •  Root: 'sec' = cut, divide, or separate</a:t>
             </a:r>
             <a:endParaRPr lang="en-US" sz="800" dirty="0"/>
           </a:p>
@@ -37328,7 +37661,7 @@
                 <a:ea typeface="Calibri" pitchFamily="34" charset="-122"/>
                 <a:cs typeface="Calibri" pitchFamily="34" charset="-120"/>
               </a:rPr>
-              <a:t>1.  The root 'sec' comes from a Latin word meaning to cut or divide.</a:t>
+              <a:t>1.  To bisect something means to cut it into two equal parts.</a:t>
             </a:r>
             <a:endParaRPr lang="en-US" sz="1300" dirty="0"/>
           </a:p>
@@ -37467,7 +37800,7 @@
                 <a:ea typeface="Calibri" pitchFamily="34" charset="-122"/>
                 <a:cs typeface="Calibri" pitchFamily="34" charset="-120"/>
               </a:rPr>
-              <a:t>2.  The word 'bisect' means to cut something into three equal parts.</a:t>
+              <a:t>2.  The word 'insect' has nothing to do with the root 'sec'.</a:t>
             </a:r>
             <a:endParaRPr lang="en-US" sz="1300" dirty="0"/>
           </a:p>
@@ -37606,7 +37939,7 @@
                 <a:ea typeface="Calibri" pitchFamily="34" charset="-122"/>
                 <a:cs typeface="Calibri" pitchFamily="34" charset="-120"/>
               </a:rPr>
-              <a:t>3.  An insect's body is divided into three sections, which links to the meaning of 'sec'.</a:t>
+              <a:t>3.  The root 'sec' comes from a Latin word meaning to cut or divide.</a:t>
             </a:r>
             <a:endParaRPr lang="en-US" sz="1300" dirty="0"/>
           </a:p>
@@ -37745,7 +38078,7 @@
                 <a:ea typeface="Calibri" pitchFamily="34" charset="-122"/>
                 <a:cs typeface="Calibri" pitchFamily="34" charset="-120"/>
               </a:rPr>
-              <a:t>4.  The word 'intersect' contains the root 'sec' meaning to cut.</a:t>
+              <a:t>4.  The prefix 'trans' means across, so a transect is a cut made across an area.</a:t>
             </a:r>
             <a:endParaRPr lang="en-US" sz="1300" dirty="0"/>
           </a:p>
@@ -37884,7 +38217,7 @@
                 <a:ea typeface="Calibri" pitchFamily="34" charset="-122"/>
                 <a:cs typeface="Calibri" pitchFamily="34" charset="-120"/>
               </a:rPr>
-              <a:t>5.  The root 'sec' comes from a Greek word meaning to measure.</a:t>
+              <a:t>5.  The root 'sec' comes from the Greek word for circle.</a:t>
             </a:r>
             <a:endParaRPr lang="en-US" sz="1300" dirty="0"/>
           </a:p>
@@ -38242,7 +38575,7 @@
                 <a:ea typeface="Calibri" pitchFamily="34" charset="-122"/>
                 <a:cs typeface="Calibri" pitchFamily="34" charset="-120"/>
               </a:rPr>
-              <a:t>Word Labs  •  wordlabs.app  •  Root: 'sec' = cut, divide, separate</a:t>
+              <a:t>Word Labs  •  wordlabs.app  •  Root: 'sec' = cut, divide, or separate</a:t>
             </a:r>
             <a:endParaRPr lang="en-US" sz="800" dirty="0"/>
           </a:p>
@@ -38379,7 +38712,7 @@
                 <a:ea typeface="Trebuchet MS" pitchFamily="34" charset="-122"/>
                 <a:cs typeface="Trebuchet MS" pitchFamily="34" charset="-120"/>
               </a:rPr>
-              <a:t>cut, divide, separate</a:t>
+              <a:t>cut, divide, or separate</a:t>
             </a:r>
             <a:endParaRPr lang="en-US" sz="2000" dirty="0"/>
           </a:p>
@@ -38655,7 +38988,7 @@
                 <a:ea typeface="Trebuchet MS" pitchFamily="34" charset="-122"/>
                 <a:cs typeface="Trebuchet MS" pitchFamily="34" charset="-120"/>
               </a:rPr>
-              <a:t>intersect</a:t>
+              <a:t>bisect</a:t>
             </a:r>
             <a:endParaRPr lang="en-US" sz="1300" dirty="0"/>
           </a:p>
@@ -38721,7 +39054,7 @@
                 <a:ea typeface="Trebuchet MS" pitchFamily="34" charset="-122"/>
                 <a:cs typeface="Trebuchet MS" pitchFamily="34" charset="-120"/>
               </a:rPr>
-              <a:t>bisect</a:t>
+              <a:t>dissect</a:t>
             </a:r>
             <a:endParaRPr lang="en-US" sz="1300" dirty="0"/>
           </a:p>
@@ -38787,7 +39120,7 @@
                 <a:ea typeface="Trebuchet MS" pitchFamily="34" charset="-122"/>
                 <a:cs typeface="Trebuchet MS" pitchFamily="34" charset="-120"/>
               </a:rPr>
-              <a:t>dissect</a:t>
+              <a:t>intersect</a:t>
             </a:r>
             <a:endParaRPr lang="en-US" sz="1300" dirty="0"/>
           </a:p>
@@ -39211,7 +39544,7 @@
                 <a:ea typeface="Calibri" pitchFamily="34" charset="-122"/>
                 <a:cs typeface="Calibri" pitchFamily="34" charset="-120"/>
               </a:rPr>
-              <a:t>Word Labs  •  wordlabs.app  •  Root: 'sec' = cut, divide, separate</a:t>
+              <a:t>Word Labs  •  wordlabs.app  •  Root: 'sec' = cut, divide, or separate</a:t>
             </a:r>
             <a:endParaRPr lang="en-US" sz="800" dirty="0"/>
           </a:p>
@@ -39946,7 +40279,7 @@
                 <a:ea typeface="Trebuchet MS" pitchFamily="34" charset="-122"/>
                 <a:cs typeface="Trebuchet MS" pitchFamily="34" charset="-120"/>
               </a:rPr>
-              <a:t>-tions</a:t>
+              <a:t>-tion</a:t>
             </a:r>
             <a:endParaRPr lang="en-US" sz="1300" dirty="0"/>
           </a:p>
@@ -40099,7 +40432,7 @@
                 <a:ea typeface="Trebuchet MS" pitchFamily="34" charset="-122"/>
                 <a:cs typeface="Trebuchet MS" pitchFamily="34" charset="-120"/>
               </a:rPr>
-              <a:t>-ment</a:t>
+              <a:t>-ant</a:t>
             </a:r>
             <a:endParaRPr lang="en-US" sz="1300" dirty="0"/>
           </a:p>
@@ -40252,7 +40585,7 @@
                 <a:ea typeface="Trebuchet MS" pitchFamily="34" charset="-122"/>
                 <a:cs typeface="Trebuchet MS" pitchFamily="34" charset="-120"/>
               </a:rPr>
-              <a:t>-ed</a:t>
+              <a:t>-ment</a:t>
             </a:r>
             <a:endParaRPr lang="en-US" sz="1300" dirty="0"/>
           </a:p>
@@ -40985,7 +41318,7 @@
                 <a:ea typeface="Calibri" pitchFamily="34" charset="-122"/>
                 <a:cs typeface="Calibri" pitchFamily="34" charset="-120"/>
               </a:rPr>
-              <a:t>Word Labs  •  wordlabs.app  •  Root: 'sec' = cut, divide, separate</a:t>
+              <a:t>Word Labs  •  wordlabs.app  •  Root: 'sec' = cut, divide, or separate</a:t>
             </a:r>
             <a:endParaRPr lang="en-US" sz="800" dirty="0"/>
           </a:p>
@@ -41163,7 +41496,7 @@
                 <a:ea typeface="Calibri" pitchFamily="34" charset="-122"/>
                 <a:cs typeface="Calibri" pitchFamily="34" charset="-120"/>
               </a:rPr>
-              <a:t>A straight line or path cut through an area so scientists can study the plants and animals along it.</a:t>
+              <a:t>A straight line or strip cut across an area to study what lives there.</a:t>
             </a:r>
             <a:endParaRPr lang="en-US" sz="1200" dirty="0"/>
           </a:p>
@@ -41302,7 +41635,7 @@
                 <a:ea typeface="Calibri" pitchFamily="34" charset="-122"/>
                 <a:cs typeface="Calibri" pitchFamily="34" charset="-120"/>
               </a:rPr>
-              <a:t>To carefully cut something open to study what is inside it.</a:t>
+              <a:t>When two lines or roads cross over each other and meet in the middle.</a:t>
             </a:r>
             <a:endParaRPr lang="en-US" sz="1200" dirty="0"/>
           </a:p>
@@ -41375,7 +41708,7 @@
                 <a:ea typeface="Trebuchet MS" pitchFamily="34" charset="-122"/>
                 <a:cs typeface="Trebuchet MS" pitchFamily="34" charset="-120"/>
               </a:rPr>
-              <a:t>intersect</a:t>
+              <a:t>bisect</a:t>
             </a:r>
             <a:endParaRPr lang="en-US" sz="1200" dirty="0"/>
           </a:p>
@@ -41441,7 +41774,7 @@
                 <a:ea typeface="Calibri" pitchFamily="34" charset="-122"/>
                 <a:cs typeface="Calibri" pitchFamily="34" charset="-120"/>
               </a:rPr>
-              <a:t>To cut something exactly in half, creating two equal parts.</a:t>
+              <a:t>To carefully cut something apart to study what is inside it.</a:t>
             </a:r>
             <a:endParaRPr lang="en-US" sz="1200" dirty="0"/>
           </a:p>
@@ -41514,7 +41847,7 @@
                 <a:ea typeface="Trebuchet MS" pitchFamily="34" charset="-122"/>
                 <a:cs typeface="Trebuchet MS" pitchFamily="34" charset="-120"/>
               </a:rPr>
-              <a:t>bisect</a:t>
+              <a:t>dissect</a:t>
             </a:r>
             <a:endParaRPr lang="en-US" sz="1200" dirty="0"/>
           </a:p>
@@ -41580,7 +41913,7 @@
                 <a:ea typeface="Calibri" pitchFamily="34" charset="-122"/>
                 <a:cs typeface="Calibri" pitchFamily="34" charset="-120"/>
               </a:rPr>
-              <a:t>When a doctor surgically cuts out a part of the body that needs to be removed.</a:t>
+              <a:t>When a surgeon carefully cuts away a part of the body during an operation.</a:t>
             </a:r>
             <a:endParaRPr lang="en-US" sz="1200" dirty="0"/>
           </a:p>
@@ -41653,7 +41986,7 @@
                 <a:ea typeface="Trebuchet MS" pitchFamily="34" charset="-122"/>
                 <a:cs typeface="Trebuchet MS" pitchFamily="34" charset="-120"/>
               </a:rPr>
-              <a:t>dissect</a:t>
+              <a:t>intersect</a:t>
             </a:r>
             <a:endParaRPr lang="en-US" sz="1200" dirty="0"/>
           </a:p>
@@ -41719,7 +42052,7 @@
                 <a:ea typeface="Calibri" pitchFamily="34" charset="-122"/>
                 <a:cs typeface="Calibri" pitchFamily="34" charset="-120"/>
               </a:rPr>
-              <a:t>When two lines or roads cross over each other and meet in the middle.</a:t>
+              <a:t>To cut something into exactly two equal halves.</a:t>
             </a:r>
             <a:endParaRPr lang="en-US" sz="1200" dirty="0"/>
           </a:p>
@@ -41858,7 +42191,7 @@
                 <a:ea typeface="Calibri" pitchFamily="34" charset="-122"/>
                 <a:cs typeface="Calibri" pitchFamily="34" charset="-120"/>
               </a:rPr>
-              <a:t>A part that has been cut off or divided from the rest of something, like a section of an orange.</a:t>
+              <a:t>A part that has been cut or divided from a whole, like a section of an orange.</a:t>
             </a:r>
             <a:endParaRPr lang="en-US" sz="1200" dirty="0"/>
           </a:p>
@@ -41997,7 +42330,7 @@
                 <a:ea typeface="Calibri" pitchFamily="34" charset="-122"/>
                 <a:cs typeface="Calibri" pitchFamily="34" charset="-120"/>
               </a:rPr>
-              <a:t>A separate part of something larger, like the health sector or the business sector.</a:t>
+              <a:t>A divided part of an area or group, like the business sector of a city.</a:t>
             </a:r>
             <a:endParaRPr lang="en-US" sz="1200" dirty="0"/>
           </a:p>
@@ -42289,7 +42622,7 @@
                 <a:ea typeface="Calibri" pitchFamily="34" charset="-122"/>
                 <a:cs typeface="Calibri" pitchFamily="34" charset="-120"/>
               </a:rPr>
-              <a:t>Word Labs  •  wordlabs.app  •  Root: 'sec' = cut, divide, separate</a:t>
+              <a:t>Word Labs  •  wordlabs.app  •  Root: 'sec' = cut, divide, or separate</a:t>
             </a:r>
             <a:endParaRPr lang="en-US" sz="800" dirty="0"/>
           </a:p>
@@ -42492,7 +42825,7 @@
                 <a:ea typeface="Calibri" pitchFamily="34" charset="-122"/>
                 <a:cs typeface="Calibri" pitchFamily="34" charset="-120"/>
               </a:rPr>
-              <a:t>The teacher asked us to bisect the angle carefully using a ruler and compass.</a:t>
+              <a:t>The teacher asked us to bisect the circle carefully using a ruler and pencil.</a:t>
             </a:r>
             <a:endParaRPr lang="en-US" sz="1500" dirty="0"/>
           </a:p>
@@ -42656,7 +42989,7 @@
                 <a:ea typeface="Calibri" pitchFamily="34" charset="-122"/>
                 <a:cs typeface="Calibri" pitchFamily="34" charset="-120"/>
               </a:rPr>
-              <a:t>The science class had to study each section of the leaf under a microscope.</a:t>
+              <a:t>We studied a cross-section of the tree trunk to count how many rings it had.</a:t>
             </a:r>
             <a:endParaRPr lang="en-US" sz="1500" dirty="0"/>
           </a:p>
@@ -42820,7 +43153,7 @@
                 <a:ea typeface="Calibri" pitchFamily="34" charset="-122"/>
                 <a:cs typeface="Calibri" pitchFamily="34" charset="-120"/>
               </a:rPr>
-              <a:t>The two roads intersect at the centre of town, forming a busy crossroads.</a:t>
+              <a:t>The two roads intersect at the main roundabout near our school.</a:t>
             </a:r>
             <a:endParaRPr lang="en-US" sz="1500" dirty="0"/>
           </a:p>
